--- a/チーム制作企画書.pptx
+++ b/チーム制作企画書.pptx
@@ -5,16 +5,18 @@
     <p:sldMasterId id="2147483648" r:id="rId1"/>
   </p:sldMasterIdLst>
   <p:notesMasterIdLst>
-    <p:notesMasterId r:id="rId9"/>
+    <p:notesMasterId r:id="rId11"/>
   </p:notesMasterIdLst>
   <p:sldIdLst>
-    <p:sldId id="256" r:id="rId2"/>
-    <p:sldId id="257" r:id="rId3"/>
-    <p:sldId id="263" r:id="rId4"/>
-    <p:sldId id="259" r:id="rId5"/>
-    <p:sldId id="262" r:id="rId6"/>
-    <p:sldId id="260" r:id="rId7"/>
-    <p:sldId id="261" r:id="rId8"/>
+    <p:sldId id="264" r:id="rId2"/>
+    <p:sldId id="256" r:id="rId3"/>
+    <p:sldId id="257" r:id="rId4"/>
+    <p:sldId id="263" r:id="rId5"/>
+    <p:sldId id="265" r:id="rId6"/>
+    <p:sldId id="259" r:id="rId7"/>
+    <p:sldId id="262" r:id="rId8"/>
+    <p:sldId id="260" r:id="rId9"/>
+    <p:sldId id="261" r:id="rId10"/>
   </p:sldIdLst>
   <p:sldSz cx="12192000" cy="6858000"/>
   <p:notesSz cx="6858000" cy="9144000"/>
@@ -203,7 +205,7 @@
           <a:p>
             <a:fld id="{CDC39EF4-E118-4F1C-8737-E9ABF732305C}" type="datetimeFigureOut">
               <a:rPr kumimoji="1" lang="ja-JP" altLang="en-US" smtClean="0"/>
-              <a:t>2026/4/23</a:t>
+              <a:t>2026/4/27</a:t>
             </a:fld>
             <a:endParaRPr kumimoji="1" lang="ja-JP" altLang="en-US"/>
           </a:p>
@@ -570,7 +572,7 @@
           <a:p>
             <a:fld id="{5FD73967-B4E4-4BA4-97C8-32FB1BD2FEBB}" type="slidenum">
               <a:rPr kumimoji="1" lang="ja-JP" altLang="en-US" smtClean="0"/>
-              <a:t>2</a:t>
+              <a:t>3</a:t>
             </a:fld>
             <a:endParaRPr kumimoji="1" lang="ja-JP" altLang="en-US"/>
           </a:p>
@@ -736,7 +738,7 @@
           <a:p>
             <a:fld id="{3110F15D-2E9B-47C9-86DF-58A2282AFBC9}" type="datetimeFigureOut">
               <a:rPr kumimoji="1" lang="ja-JP" altLang="en-US" smtClean="0"/>
-              <a:t>2026/4/23</a:t>
+              <a:t>2026/4/27</a:t>
             </a:fld>
             <a:endParaRPr kumimoji="1" lang="ja-JP" altLang="en-US"/>
           </a:p>
@@ -966,7 +968,7 @@
           <a:p>
             <a:fld id="{3110F15D-2E9B-47C9-86DF-58A2282AFBC9}" type="datetimeFigureOut">
               <a:rPr kumimoji="1" lang="ja-JP" altLang="en-US" smtClean="0"/>
-              <a:t>2026/4/23</a:t>
+              <a:t>2026/4/27</a:t>
             </a:fld>
             <a:endParaRPr kumimoji="1" lang="ja-JP" altLang="en-US"/>
           </a:p>
@@ -1206,7 +1208,7 @@
           <a:p>
             <a:fld id="{3110F15D-2E9B-47C9-86DF-58A2282AFBC9}" type="datetimeFigureOut">
               <a:rPr kumimoji="1" lang="ja-JP" altLang="en-US" smtClean="0"/>
-              <a:t>2026/4/23</a:t>
+              <a:t>2026/4/27</a:t>
             </a:fld>
             <a:endParaRPr kumimoji="1" lang="ja-JP" altLang="en-US"/>
           </a:p>
@@ -1436,7 +1438,7 @@
           <a:p>
             <a:fld id="{3110F15D-2E9B-47C9-86DF-58A2282AFBC9}" type="datetimeFigureOut">
               <a:rPr kumimoji="1" lang="ja-JP" altLang="en-US" smtClean="0"/>
-              <a:t>2026/4/23</a:t>
+              <a:t>2026/4/27</a:t>
             </a:fld>
             <a:endParaRPr kumimoji="1" lang="ja-JP" altLang="en-US"/>
           </a:p>
@@ -1711,7 +1713,7 @@
           <a:p>
             <a:fld id="{3110F15D-2E9B-47C9-86DF-58A2282AFBC9}" type="datetimeFigureOut">
               <a:rPr kumimoji="1" lang="ja-JP" altLang="en-US" smtClean="0"/>
-              <a:t>2026/4/23</a:t>
+              <a:t>2026/4/27</a:t>
             </a:fld>
             <a:endParaRPr kumimoji="1" lang="ja-JP" altLang="en-US"/>
           </a:p>
@@ -2040,7 +2042,7 @@
           <a:p>
             <a:fld id="{3110F15D-2E9B-47C9-86DF-58A2282AFBC9}" type="datetimeFigureOut">
               <a:rPr kumimoji="1" lang="ja-JP" altLang="en-US" smtClean="0"/>
-              <a:t>2026/4/23</a:t>
+              <a:t>2026/4/27</a:t>
             </a:fld>
             <a:endParaRPr kumimoji="1" lang="ja-JP" altLang="en-US"/>
           </a:p>
@@ -2516,7 +2518,7 @@
           <a:p>
             <a:fld id="{3110F15D-2E9B-47C9-86DF-58A2282AFBC9}" type="datetimeFigureOut">
               <a:rPr kumimoji="1" lang="ja-JP" altLang="en-US" smtClean="0"/>
-              <a:t>2026/4/23</a:t>
+              <a:t>2026/4/27</a:t>
             </a:fld>
             <a:endParaRPr kumimoji="1" lang="ja-JP" altLang="en-US"/>
           </a:p>
@@ -2657,7 +2659,7 @@
           <a:p>
             <a:fld id="{3110F15D-2E9B-47C9-86DF-58A2282AFBC9}" type="datetimeFigureOut">
               <a:rPr kumimoji="1" lang="ja-JP" altLang="en-US" smtClean="0"/>
-              <a:t>2026/4/23</a:t>
+              <a:t>2026/4/27</a:t>
             </a:fld>
             <a:endParaRPr kumimoji="1" lang="ja-JP" altLang="en-US"/>
           </a:p>
@@ -2770,7 +2772,7 @@
           <a:p>
             <a:fld id="{3110F15D-2E9B-47C9-86DF-58A2282AFBC9}" type="datetimeFigureOut">
               <a:rPr kumimoji="1" lang="ja-JP" altLang="en-US" smtClean="0"/>
-              <a:t>2026/4/23</a:t>
+              <a:t>2026/4/27</a:t>
             </a:fld>
             <a:endParaRPr kumimoji="1" lang="ja-JP" altLang="en-US"/>
           </a:p>
@@ -3113,7 +3115,7 @@
           <a:p>
             <a:fld id="{3110F15D-2E9B-47C9-86DF-58A2282AFBC9}" type="datetimeFigureOut">
               <a:rPr kumimoji="1" lang="ja-JP" altLang="en-US" smtClean="0"/>
-              <a:t>2026/4/23</a:t>
+              <a:t>2026/4/27</a:t>
             </a:fld>
             <a:endParaRPr kumimoji="1" lang="ja-JP" altLang="en-US"/>
           </a:p>
@@ -3401,7 +3403,7 @@
           <a:p>
             <a:fld id="{3110F15D-2E9B-47C9-86DF-58A2282AFBC9}" type="datetimeFigureOut">
               <a:rPr kumimoji="1" lang="ja-JP" altLang="en-US" smtClean="0"/>
-              <a:t>2026/4/23</a:t>
+              <a:t>2026/4/27</a:t>
             </a:fld>
             <a:endParaRPr kumimoji="1" lang="ja-JP" altLang="en-US"/>
           </a:p>
@@ -3674,7 +3676,7 @@
           <a:p>
             <a:fld id="{3110F15D-2E9B-47C9-86DF-58A2282AFBC9}" type="datetimeFigureOut">
               <a:rPr kumimoji="1" lang="ja-JP" altLang="en-US" smtClean="0"/>
-              <a:t>2026/4/23</a:t>
+              <a:t>2026/4/27</a:t>
             </a:fld>
             <a:endParaRPr kumimoji="1" lang="ja-JP" altLang="en-US"/>
           </a:p>
@@ -4093,25 +4095,26 @@
       </p:grpSpPr>
       <p:sp>
         <p:nvSpPr>
-          <p:cNvPr id="3" name="字幕 2">
+          <p:cNvPr id="4" name="字幕 2">
             <a:extLst>
               <a:ext uri="{FF2B5EF4-FFF2-40B4-BE49-F238E27FC236}">
                 <a16:creationId xmlns:a16="http://schemas.microsoft.com/office/drawing/2014/main" id="{5FA6C663-F92E-EF1E-81E5-93319E09ECC2}"/>
               </a:ext>
             </a:extLst>
           </p:cNvPr>
-          <p:cNvSpPr>
-            <a:spLocks noGrp="1"/>
-          </p:cNvSpPr>
-          <p:nvPr>
-            <p:ph type="subTitle" idx="1"/>
-          </p:nvPr>
+          <p:cNvSpPr txBox="1">
+            <a:spLocks/>
+          </p:cNvSpPr>
+          <p:nvPr/>
         </p:nvSpPr>
         <p:spPr>
           <a:xfrm>
-            <a:off x="9393381" y="4608945"/>
-            <a:ext cx="2087418" cy="1856509"/>
+            <a:off x="3611419" y="2752438"/>
+            <a:ext cx="5606472" cy="3371272"/>
           </a:xfrm>
+          <a:prstGeom prst="rect">
+            <a:avLst/>
+          </a:prstGeom>
           <a:ln>
             <a:solidFill>
               <a:schemeClr val="tx1"/>
@@ -4119,57 +4122,234 @@
           </a:ln>
         </p:spPr>
         <p:txBody>
-          <a:bodyPr>
-            <a:normAutofit fontScale="92500" lnSpcReduction="20000"/>
+          <a:bodyPr vert="horz" lIns="91440" tIns="45720" rIns="91440" bIns="45720" rtlCol="0">
+            <a:normAutofit/>
           </a:bodyPr>
-          <a:lstStyle/>
-          <a:p>
-            <a:pPr algn="l"/>
-            <a:r>
-              <a:rPr kumimoji="1" lang="ja-JP" altLang="en-US" dirty="0"/>
-              <a:t>制作</a:t>
-            </a:r>
-            <a:endParaRPr kumimoji="1" lang="en-US" altLang="ja-JP" dirty="0"/>
-          </a:p>
-          <a:p>
-            <a:pPr algn="l"/>
+          <a:lstStyle>
+            <a:lvl1pPr marL="228600" indent="-228600" algn="l" defTabSz="914400" rtl="0" eaLnBrk="1" latinLnBrk="0" hangingPunct="1">
+              <a:lnSpc>
+                <a:spcPct val="90000"/>
+              </a:lnSpc>
+              <a:spcBef>
+                <a:spcPts val="1000"/>
+              </a:spcBef>
+              <a:buFont typeface="Arial" panose="020B0604020202020204" pitchFamily="34" charset="0"/>
+              <a:buChar char="•"/>
+              <a:defRPr kumimoji="1" sz="2800" kern="1200">
+                <a:solidFill>
+                  <a:schemeClr val="tx1"/>
+                </a:solidFill>
+                <a:latin typeface="+mn-lt"/>
+                <a:ea typeface="+mn-ea"/>
+                <a:cs typeface="+mn-cs"/>
+              </a:defRPr>
+            </a:lvl1pPr>
+            <a:lvl2pPr marL="685800" indent="-228600" algn="l" defTabSz="914400" rtl="0" eaLnBrk="1" latinLnBrk="0" hangingPunct="1">
+              <a:lnSpc>
+                <a:spcPct val="90000"/>
+              </a:lnSpc>
+              <a:spcBef>
+                <a:spcPts val="500"/>
+              </a:spcBef>
+              <a:buFont typeface="Arial" panose="020B0604020202020204" pitchFamily="34" charset="0"/>
+              <a:buChar char="•"/>
+              <a:defRPr kumimoji="1" sz="2400" kern="1200">
+                <a:solidFill>
+                  <a:schemeClr val="tx1"/>
+                </a:solidFill>
+                <a:latin typeface="+mn-lt"/>
+                <a:ea typeface="+mn-ea"/>
+                <a:cs typeface="+mn-cs"/>
+              </a:defRPr>
+            </a:lvl2pPr>
+            <a:lvl3pPr marL="1143000" indent="-228600" algn="l" defTabSz="914400" rtl="0" eaLnBrk="1" latinLnBrk="0" hangingPunct="1">
+              <a:lnSpc>
+                <a:spcPct val="90000"/>
+              </a:lnSpc>
+              <a:spcBef>
+                <a:spcPts val="500"/>
+              </a:spcBef>
+              <a:buFont typeface="Arial" panose="020B0604020202020204" pitchFamily="34" charset="0"/>
+              <a:buChar char="•"/>
+              <a:defRPr kumimoji="1" sz="2000" kern="1200">
+                <a:solidFill>
+                  <a:schemeClr val="tx1"/>
+                </a:solidFill>
+                <a:latin typeface="+mn-lt"/>
+                <a:ea typeface="+mn-ea"/>
+                <a:cs typeface="+mn-cs"/>
+              </a:defRPr>
+            </a:lvl3pPr>
+            <a:lvl4pPr marL="1600200" indent="-228600" algn="l" defTabSz="914400" rtl="0" eaLnBrk="1" latinLnBrk="0" hangingPunct="1">
+              <a:lnSpc>
+                <a:spcPct val="90000"/>
+              </a:lnSpc>
+              <a:spcBef>
+                <a:spcPts val="500"/>
+              </a:spcBef>
+              <a:buFont typeface="Arial" panose="020B0604020202020204" pitchFamily="34" charset="0"/>
+              <a:buChar char="•"/>
+              <a:defRPr kumimoji="1" sz="1800" kern="1200">
+                <a:solidFill>
+                  <a:schemeClr val="tx1"/>
+                </a:solidFill>
+                <a:latin typeface="+mn-lt"/>
+                <a:ea typeface="+mn-ea"/>
+                <a:cs typeface="+mn-cs"/>
+              </a:defRPr>
+            </a:lvl4pPr>
+            <a:lvl5pPr marL="2057400" indent="-228600" algn="l" defTabSz="914400" rtl="0" eaLnBrk="1" latinLnBrk="0" hangingPunct="1">
+              <a:lnSpc>
+                <a:spcPct val="90000"/>
+              </a:lnSpc>
+              <a:spcBef>
+                <a:spcPts val="500"/>
+              </a:spcBef>
+              <a:buFont typeface="Arial" panose="020B0604020202020204" pitchFamily="34" charset="0"/>
+              <a:buChar char="•"/>
+              <a:defRPr kumimoji="1" sz="1800" kern="1200">
+                <a:solidFill>
+                  <a:schemeClr val="tx1"/>
+                </a:solidFill>
+                <a:latin typeface="+mn-lt"/>
+                <a:ea typeface="+mn-ea"/>
+                <a:cs typeface="+mn-cs"/>
+              </a:defRPr>
+            </a:lvl5pPr>
+            <a:lvl6pPr marL="2514600" indent="-228600" algn="l" defTabSz="914400" rtl="0" eaLnBrk="1" latinLnBrk="0" hangingPunct="1">
+              <a:lnSpc>
+                <a:spcPct val="90000"/>
+              </a:lnSpc>
+              <a:spcBef>
+                <a:spcPts val="500"/>
+              </a:spcBef>
+              <a:buFont typeface="Arial" panose="020B0604020202020204" pitchFamily="34" charset="0"/>
+              <a:buChar char="•"/>
+              <a:defRPr kumimoji="1" sz="1800" kern="1200">
+                <a:solidFill>
+                  <a:schemeClr val="tx1"/>
+                </a:solidFill>
+                <a:latin typeface="+mn-lt"/>
+                <a:ea typeface="+mn-ea"/>
+                <a:cs typeface="+mn-cs"/>
+              </a:defRPr>
+            </a:lvl6pPr>
+            <a:lvl7pPr marL="2971800" indent="-228600" algn="l" defTabSz="914400" rtl="0" eaLnBrk="1" latinLnBrk="0" hangingPunct="1">
+              <a:lnSpc>
+                <a:spcPct val="90000"/>
+              </a:lnSpc>
+              <a:spcBef>
+                <a:spcPts val="500"/>
+              </a:spcBef>
+              <a:buFont typeface="Arial" panose="020B0604020202020204" pitchFamily="34" charset="0"/>
+              <a:buChar char="•"/>
+              <a:defRPr kumimoji="1" sz="1800" kern="1200">
+                <a:solidFill>
+                  <a:schemeClr val="tx1"/>
+                </a:solidFill>
+                <a:latin typeface="+mn-lt"/>
+                <a:ea typeface="+mn-ea"/>
+                <a:cs typeface="+mn-cs"/>
+              </a:defRPr>
+            </a:lvl7pPr>
+            <a:lvl8pPr marL="3429000" indent="-228600" algn="l" defTabSz="914400" rtl="0" eaLnBrk="1" latinLnBrk="0" hangingPunct="1">
+              <a:lnSpc>
+                <a:spcPct val="90000"/>
+              </a:lnSpc>
+              <a:spcBef>
+                <a:spcPts val="500"/>
+              </a:spcBef>
+              <a:buFont typeface="Arial" panose="020B0604020202020204" pitchFamily="34" charset="0"/>
+              <a:buChar char="•"/>
+              <a:defRPr kumimoji="1" sz="1800" kern="1200">
+                <a:solidFill>
+                  <a:schemeClr val="tx1"/>
+                </a:solidFill>
+                <a:latin typeface="+mn-lt"/>
+                <a:ea typeface="+mn-ea"/>
+                <a:cs typeface="+mn-cs"/>
+              </a:defRPr>
+            </a:lvl8pPr>
+            <a:lvl9pPr marL="3886200" indent="-228600" algn="l" defTabSz="914400" rtl="0" eaLnBrk="1" latinLnBrk="0" hangingPunct="1">
+              <a:lnSpc>
+                <a:spcPct val="90000"/>
+              </a:lnSpc>
+              <a:spcBef>
+                <a:spcPts val="500"/>
+              </a:spcBef>
+              <a:buFont typeface="Arial" panose="020B0604020202020204" pitchFamily="34" charset="0"/>
+              <a:buChar char="•"/>
+              <a:defRPr kumimoji="1" sz="1800" kern="1200">
+                <a:solidFill>
+                  <a:schemeClr val="tx1"/>
+                </a:solidFill>
+                <a:latin typeface="+mn-lt"/>
+                <a:ea typeface="+mn-ea"/>
+                <a:cs typeface="+mn-cs"/>
+              </a:defRPr>
+            </a:lvl9pPr>
+          </a:lstStyle>
+          <a:p>
+            <a:pPr marL="0" indent="0">
+              <a:buNone/>
+            </a:pPr>
+            <a:r>
+              <a:rPr lang="ja-JP" altLang="en-US" dirty="0"/>
+              <a:t>チームメンバー</a:t>
+            </a:r>
+            <a:endParaRPr lang="en-US" altLang="ja-JP" dirty="0"/>
+          </a:p>
+          <a:p>
+            <a:pPr marL="0" indent="0">
+              <a:buNone/>
+            </a:pPr>
+            <a:r>
+              <a:rPr lang="ja-JP" altLang="en-US" dirty="0"/>
+              <a:t>・廣松健吾　　（リーダー）</a:t>
+            </a:r>
+            <a:endParaRPr lang="en-US" altLang="ja-JP" dirty="0"/>
+          </a:p>
+          <a:p>
+            <a:pPr marL="0" indent="0">
+              <a:buNone/>
+            </a:pPr>
+            <a:r>
+              <a:rPr lang="ja-JP" altLang="en-US" dirty="0"/>
+              <a:t>・平木諒　　　（イラスト担当）</a:t>
+            </a:r>
+            <a:endParaRPr lang="en-US" altLang="ja-JP" dirty="0"/>
+          </a:p>
+          <a:p>
+            <a:pPr marL="0" indent="0">
+              <a:buNone/>
+            </a:pPr>
             <a:r>
               <a:rPr lang="ja-JP" altLang="en-US" dirty="0"/>
               <a:t>・</a:t>
             </a:r>
+            <a:r>
+              <a:rPr lang="ja-JP" altLang="en-US"/>
+              <a:t>廣田凌　　　（主人公）</a:t>
+            </a:r>
             <a:endParaRPr lang="en-US" altLang="ja-JP" dirty="0"/>
           </a:p>
           <a:p>
-            <a:pPr algn="l"/>
-            <a:r>
-              <a:rPr kumimoji="1" lang="ja-JP" altLang="en-US" dirty="0"/>
-              <a:t>・</a:t>
-            </a:r>
-            <a:endParaRPr kumimoji="1" lang="en-US" altLang="ja-JP" dirty="0"/>
-          </a:p>
-          <a:p>
-            <a:pPr algn="l"/>
+            <a:pPr marL="0" indent="0">
+              <a:buNone/>
+            </a:pPr>
             <a:r>
               <a:rPr lang="ja-JP" altLang="en-US" dirty="0"/>
-              <a:t>・</a:t>
-            </a:r>
-            <a:endParaRPr lang="en-US" altLang="ja-JP" dirty="0"/>
-          </a:p>
-          <a:p>
-            <a:pPr algn="l"/>
-            <a:r>
-              <a:rPr kumimoji="1" lang="ja-JP" altLang="en-US" dirty="0"/>
-              <a:t>・</a:t>
-            </a:r>
-          </a:p>
-        </p:txBody>
-      </p:sp>
-      <p:sp>
-        <p:nvSpPr>
-          <p:cNvPr id="4" name="正方形/長方形 3">
-            <a:extLst>
-              <a:ext uri="{FF2B5EF4-FFF2-40B4-BE49-F238E27FC236}">
-                <a16:creationId xmlns:a16="http://schemas.microsoft.com/office/drawing/2014/main" id="{7746ABC0-8FB4-0F4B-AE86-7C5B63780666}"/>
+              <a:t>・久保田七翔　（ボス）</a:t>
+            </a:r>
+          </a:p>
+        </p:txBody>
+      </p:sp>
+      <p:sp>
+        <p:nvSpPr>
+          <p:cNvPr id="5" name="正方形/長方形 4">
+            <a:extLst>
+              <a:ext uri="{FF2B5EF4-FFF2-40B4-BE49-F238E27FC236}">
+                <a16:creationId xmlns:a16="http://schemas.microsoft.com/office/drawing/2014/main" id="{E09CA9FB-32DC-6EBB-D7C3-B2F273EAFD62}"/>
               </a:ext>
             </a:extLst>
           </p:cNvPr>
@@ -4178,8 +4358,8 @@
         </p:nvSpPr>
         <p:spPr>
           <a:xfrm>
-            <a:off x="1357745" y="364837"/>
-            <a:ext cx="9476510" cy="1676399"/>
+            <a:off x="309418" y="118554"/>
+            <a:ext cx="11573163" cy="2301373"/>
           </a:xfrm>
           <a:prstGeom prst="rect">
             <a:avLst/>
@@ -4207,8 +4387,104 @@
           <a:p>
             <a:pPr algn="ctr"/>
             <a:r>
-              <a:rPr kumimoji="1" lang="ja-JP" altLang="en-US" sz="8000" dirty="0"/>
-              <a:t>ゲーム名</a:t>
+              <a:rPr lang="ja-JP" altLang="en-US" sz="8000" dirty="0"/>
+              <a:t>七三飛</a:t>
+            </a:r>
+            <a:endParaRPr lang="en-US" altLang="ja-JP" sz="8000" dirty="0"/>
+          </a:p>
+        </p:txBody>
+      </p:sp>
+    </p:spTree>
+    <p:extLst>
+      <p:ext uri="{BB962C8B-B14F-4D97-AF65-F5344CB8AC3E}">
+        <p14:creationId xmlns:p14="http://schemas.microsoft.com/office/powerpoint/2010/main" val="3182292543"/>
+      </p:ext>
+    </p:extLst>
+  </p:cSld>
+  <p:clrMapOvr>
+    <a:masterClrMapping/>
+  </p:clrMapOvr>
+</p:sld>
+</file>
+
+<file path=ppt/slides/slide2.xml><?xml version="1.0" encoding="utf-8"?>
+<p:sld xmlns:a="http://schemas.openxmlformats.org/drawingml/2006/main" xmlns:r="http://schemas.openxmlformats.org/officeDocument/2006/relationships" xmlns:p="http://schemas.openxmlformats.org/presentationml/2006/main">
+  <p:cSld>
+    <p:spTree>
+      <p:nvGrpSpPr>
+        <p:cNvPr id="1" name=""/>
+        <p:cNvGrpSpPr/>
+        <p:nvPr/>
+      </p:nvGrpSpPr>
+      <p:grpSpPr>
+        <a:xfrm>
+          <a:off x="0" y="0"/>
+          <a:ext cx="0" cy="0"/>
+          <a:chOff x="0" y="0"/>
+          <a:chExt cx="0" cy="0"/>
+        </a:xfrm>
+      </p:grpSpPr>
+      <p:sp>
+        <p:nvSpPr>
+          <p:cNvPr id="4" name="正方形/長方形 3">
+            <a:extLst>
+              <a:ext uri="{FF2B5EF4-FFF2-40B4-BE49-F238E27FC236}">
+                <a16:creationId xmlns:a16="http://schemas.microsoft.com/office/drawing/2014/main" id="{7746ABC0-8FB4-0F4B-AE86-7C5B63780666}"/>
+              </a:ext>
+            </a:extLst>
+          </p:cNvPr>
+          <p:cNvSpPr/>
+          <p:nvPr/>
+        </p:nvSpPr>
+        <p:spPr>
+          <a:xfrm>
+            <a:off x="309418" y="118554"/>
+            <a:ext cx="11573163" cy="2301373"/>
+          </a:xfrm>
+          <a:prstGeom prst="rect">
+            <a:avLst/>
+          </a:prstGeom>
+        </p:spPr>
+        <p:style>
+          <a:lnRef idx="2">
+            <a:schemeClr val="accent2">
+              <a:shade val="15000"/>
+            </a:schemeClr>
+          </a:lnRef>
+          <a:fillRef idx="1">
+            <a:schemeClr val="accent2"/>
+          </a:fillRef>
+          <a:effectRef idx="0">
+            <a:schemeClr val="accent2"/>
+          </a:effectRef>
+          <a:fontRef idx="minor">
+            <a:schemeClr val="lt1"/>
+          </a:fontRef>
+        </p:style>
+        <p:txBody>
+          <a:bodyPr rtlCol="0" anchor="ctr"/>
+          <a:lstStyle/>
+          <a:p>
+            <a:pPr algn="ctr"/>
+            <a:r>
+              <a:rPr lang="en-US" altLang="ja-JP" sz="8000" dirty="0" err="1"/>
+              <a:t>Re:Human</a:t>
+            </a:r>
+            <a:endParaRPr lang="en-US" altLang="ja-JP" sz="8000" dirty="0"/>
+          </a:p>
+          <a:p>
+            <a:pPr algn="ctr"/>
+            <a:r>
+              <a:rPr lang="en-US" altLang="ja-JP" sz="8000" dirty="0"/>
+              <a:t>~</a:t>
+            </a:r>
+            <a:r>
+              <a:rPr lang="ja-JP" altLang="en-US" sz="8000" dirty="0"/>
+              <a:t>私の人生</a:t>
+            </a:r>
+            <a:r>
+              <a:rPr lang="en-US" altLang="ja-JP" sz="8000" dirty="0"/>
+              <a:t>~</a:t>
             </a:r>
           </a:p>
         </p:txBody>
@@ -4353,6 +4629,65 @@
           </a:p>
         </p:txBody>
       </p:sp>
+      <p:sp>
+        <p:nvSpPr>
+          <p:cNvPr id="13" name="テキスト ボックス 12">
+            <a:extLst>
+              <a:ext uri="{FF2B5EF4-FFF2-40B4-BE49-F238E27FC236}">
+                <a16:creationId xmlns:a16="http://schemas.microsoft.com/office/drawing/2014/main" id="{7EC1695B-3D34-B1CC-3451-A50D6F578D76}"/>
+              </a:ext>
+            </a:extLst>
+          </p:cNvPr>
+          <p:cNvSpPr txBox="1"/>
+          <p:nvPr/>
+        </p:nvSpPr>
+        <p:spPr>
+          <a:xfrm>
+            <a:off x="9217891" y="2439996"/>
+            <a:ext cx="2974109" cy="646331"/>
+          </a:xfrm>
+          <a:prstGeom prst="rect">
+            <a:avLst/>
+          </a:prstGeom>
+          <a:noFill/>
+        </p:spPr>
+        <p:txBody>
+          <a:bodyPr wrap="square" rtlCol="0">
+            <a:spAutoFit/>
+          </a:bodyPr>
+          <a:lstStyle/>
+          <a:p>
+            <a:r>
+              <a:rPr lang="ja-JP" altLang="en-US" dirty="0"/>
+              <a:t>ジャンル：ソウルライク</a:t>
+            </a:r>
+            <a:endParaRPr lang="en-US" altLang="ja-JP" dirty="0"/>
+          </a:p>
+          <a:p>
+            <a:r>
+              <a:rPr kumimoji="1" lang="en-US" altLang="ja-JP" dirty="0"/>
+              <a:t>	</a:t>
+            </a:r>
+            <a:r>
+              <a:rPr kumimoji="1" lang="ja-JP" altLang="en-US" dirty="0"/>
+              <a:t>　２</a:t>
+            </a:r>
+            <a:r>
+              <a:rPr kumimoji="1" lang="en-US" altLang="ja-JP" dirty="0"/>
+              <a:t>D</a:t>
+            </a:r>
+            <a:r>
+              <a:rPr kumimoji="1" lang="ja-JP" altLang="en-US" dirty="0"/>
+              <a:t>アクション</a:t>
+            </a:r>
+            <a:r>
+              <a:rPr kumimoji="1" lang="en-US" altLang="ja-JP" dirty="0"/>
+              <a:t>	</a:t>
+            </a:r>
+            <a:endParaRPr kumimoji="1" lang="ja-JP" altLang="en-US" dirty="0"/>
+          </a:p>
+        </p:txBody>
+      </p:sp>
     </p:spTree>
     <p:extLst>
       <p:ext uri="{BB962C8B-B14F-4D97-AF65-F5344CB8AC3E}">
@@ -4366,7 +4701,7 @@
 </p:sld>
 </file>
 
-<file path=ppt/slides/slide2.xml><?xml version="1.0" encoding="utf-8"?>
+<file path=ppt/slides/slide3.xml><?xml version="1.0" encoding="utf-8"?>
 <p:sld xmlns:a="http://schemas.openxmlformats.org/drawingml/2006/main" xmlns:r="http://schemas.openxmlformats.org/officeDocument/2006/relationships" xmlns:p="http://schemas.openxmlformats.org/presentationml/2006/main" show="0">
   <p:cSld>
     <p:spTree>
@@ -4669,7 +5004,7 @@
 </p:sld>
 </file>
 
-<file path=ppt/slides/slide3.xml><?xml version="1.0" encoding="utf-8"?>
+<file path=ppt/slides/slide4.xml><?xml version="1.0" encoding="utf-8"?>
 <p:sld xmlns:a="http://schemas.openxmlformats.org/drawingml/2006/main" xmlns:r="http://schemas.openxmlformats.org/officeDocument/2006/relationships" xmlns:p="http://schemas.openxmlformats.org/presentationml/2006/main">
   <p:cSld>
     <p:spTree>
@@ -4704,13 +5039,13 @@
         </p:nvSpPr>
         <p:spPr>
           <a:xfrm>
-            <a:off x="838200" y="1825625"/>
-            <a:ext cx="3041073" cy="1083830"/>
+            <a:off x="1965037" y="2084242"/>
+            <a:ext cx="3706090" cy="1325562"/>
           </a:xfrm>
         </p:spPr>
         <p:txBody>
           <a:bodyPr>
-            <a:normAutofit/>
+            <a:noAutofit/>
           </a:bodyPr>
           <a:lstStyle/>
           <a:p>
@@ -4718,7 +5053,7 @@
               <a:buNone/>
             </a:pPr>
             <a:r>
-              <a:rPr kumimoji="1" lang="ja-JP" altLang="en-US" sz="7200" i="1" dirty="0">
+              <a:rPr kumimoji="1" lang="ja-JP" altLang="en-US" sz="8800" i="1" dirty="0">
                 <a:latin typeface="HGP行書体" panose="03000600000000000000" pitchFamily="66" charset="-128"/>
                 <a:ea typeface="HGP行書体" panose="03000600000000000000" pitchFamily="66" charset="-128"/>
               </a:rPr>
@@ -4793,8 +5128,8 @@
         </p:nvSpPr>
         <p:spPr>
           <a:xfrm>
-            <a:off x="1163782" y="3953164"/>
-            <a:ext cx="4932218" cy="1477328"/>
+            <a:off x="1145309" y="3805382"/>
+            <a:ext cx="6262254" cy="1938992"/>
           </a:xfrm>
           <a:prstGeom prst="rect">
             <a:avLst/>
@@ -4807,112 +5142,36 @@
           </a:bodyPr>
           <a:lstStyle/>
           <a:p>
-            <a:r>
-              <a:rPr kumimoji="1" lang="ja-JP" altLang="en-US" dirty="0"/>
+            <a:pPr marL="342900" indent="-342900">
+              <a:buFont typeface="Arial" panose="020B0604020202020204" pitchFamily="34" charset="0"/>
+              <a:buChar char="•"/>
+            </a:pPr>
+            <a:r>
+              <a:rPr kumimoji="1" lang="ja-JP" altLang="en-US" sz="2400" dirty="0"/>
               <a:t>このゲームは高難易度のステージやボスを攻略していく</a:t>
             </a:r>
-            <a:endParaRPr kumimoji="1" lang="en-US" altLang="ja-JP" dirty="0"/>
-          </a:p>
-          <a:p>
-            <a:r>
-              <a:rPr kumimoji="1" lang="ja-JP" altLang="en-US" dirty="0"/>
+            <a:endParaRPr kumimoji="1" lang="en-US" altLang="ja-JP" sz="2400" dirty="0"/>
+          </a:p>
+          <a:p>
+            <a:pPr marL="342900" indent="-342900">
+              <a:buFont typeface="Arial" panose="020B0604020202020204" pitchFamily="34" charset="0"/>
+              <a:buChar char="•"/>
+            </a:pPr>
+            <a:r>
+              <a:rPr kumimoji="1" lang="ja-JP" altLang="en-US" sz="2400" dirty="0"/>
               <a:t>私たちが新しいことに挑戦し成長していくことからつけた</a:t>
             </a:r>
-            <a:endParaRPr kumimoji="1" lang="en-US" altLang="ja-JP" dirty="0"/>
-          </a:p>
-          <a:p>
-            <a:r>
-              <a:rPr kumimoji="1" lang="ja-JP" altLang="en-US" dirty="0"/>
+            <a:endParaRPr kumimoji="1" lang="en-US" altLang="ja-JP" sz="2400" dirty="0"/>
+          </a:p>
+          <a:p>
+            <a:pPr marL="342900" indent="-342900">
+              <a:buFont typeface="Arial" panose="020B0604020202020204" pitchFamily="34" charset="0"/>
+              <a:buChar char="•"/>
+            </a:pPr>
+            <a:r>
+              <a:rPr kumimoji="1" lang="ja-JP" altLang="en-US" sz="2400" dirty="0"/>
               <a:t>高難易度のゲームが好きな人</a:t>
             </a:r>
-          </a:p>
-        </p:txBody>
-      </p:sp>
-      <p:sp>
-        <p:nvSpPr>
-          <p:cNvPr id="6" name="テキスト ボックス 5">
-            <a:extLst>
-              <a:ext uri="{FF2B5EF4-FFF2-40B4-BE49-F238E27FC236}">
-                <a16:creationId xmlns:a16="http://schemas.microsoft.com/office/drawing/2014/main" id="{BBBFBCAC-AA8C-AE78-3602-00A5B0A6345B}"/>
-              </a:ext>
-            </a:extLst>
-          </p:cNvPr>
-          <p:cNvSpPr txBox="1"/>
-          <p:nvPr/>
-        </p:nvSpPr>
-        <p:spPr>
-          <a:xfrm>
-            <a:off x="7222835" y="4167664"/>
-            <a:ext cx="3629892" cy="1477328"/>
-          </a:xfrm>
-          <a:prstGeom prst="rect">
-            <a:avLst/>
-          </a:prstGeom>
-          <a:noFill/>
-        </p:spPr>
-        <p:txBody>
-          <a:bodyPr wrap="square" rtlCol="0">
-            <a:spAutoFit/>
-          </a:bodyPr>
-          <a:lstStyle/>
-          <a:p>
-            <a:r>
-              <a:rPr kumimoji="1" lang="ja-JP" altLang="en-US" dirty="0"/>
-              <a:t>ターゲット</a:t>
-            </a:r>
-            <a:endParaRPr kumimoji="1" lang="en-US" altLang="ja-JP" dirty="0"/>
-          </a:p>
-          <a:p>
-            <a:r>
-              <a:rPr lang="ja-JP" altLang="en-US" dirty="0"/>
-              <a:t>例）</a:t>
-            </a:r>
-            <a:r>
-              <a:rPr lang="en-US" altLang="ja-JP" dirty="0"/>
-              <a:t>Hollow Knight</a:t>
-            </a:r>
-            <a:r>
-              <a:rPr lang="ja-JP" altLang="en-US" dirty="0"/>
-              <a:t>　好きな層</a:t>
-            </a:r>
-            <a:endParaRPr lang="en-US" altLang="ja-JP" dirty="0"/>
-          </a:p>
-          <a:p>
-            <a:endParaRPr kumimoji="1" lang="en-US" altLang="ja-JP" dirty="0"/>
-          </a:p>
-          <a:p>
-            <a:r>
-              <a:rPr lang="ja-JP" altLang="en-US" dirty="0"/>
-              <a:t>想定：コアな層</a:t>
-            </a:r>
-            <a:r>
-              <a:rPr lang="en-US" altLang="ja-JP" dirty="0"/>
-              <a:t>3000</a:t>
-            </a:r>
-            <a:r>
-              <a:rPr lang="ja-JP" altLang="en-US" dirty="0"/>
-              <a:t>～</a:t>
-            </a:r>
-            <a:r>
-              <a:rPr lang="en-US" altLang="ja-JP" dirty="0"/>
-              <a:t>8000</a:t>
-            </a:r>
-            <a:r>
-              <a:rPr lang="ja-JP" altLang="en-US" dirty="0"/>
-              <a:t>人</a:t>
-            </a:r>
-            <a:endParaRPr lang="en-US" altLang="ja-JP" dirty="0"/>
-          </a:p>
-          <a:p>
-            <a:r>
-              <a:rPr kumimoji="1" lang="ja-JP" altLang="en-US" dirty="0"/>
-              <a:t>多くの人数に刺さる</a:t>
-            </a:r>
-            <a:r>
-              <a:rPr lang="ja-JP" altLang="en-US" dirty="0"/>
-              <a:t>わけではない</a:t>
-            </a:r>
-            <a:endParaRPr kumimoji="1" lang="ja-JP" altLang="en-US" dirty="0"/>
           </a:p>
         </p:txBody>
       </p:sp>
@@ -4929,7 +5188,804 @@
 </p:sld>
 </file>
 
-<file path=ppt/slides/slide4.xml><?xml version="1.0" encoding="utf-8"?>
+<file path=ppt/slides/slide5.xml><?xml version="1.0" encoding="utf-8"?>
+<p:sld xmlns:a="http://schemas.openxmlformats.org/drawingml/2006/main" xmlns:r="http://schemas.openxmlformats.org/officeDocument/2006/relationships" xmlns:p="http://schemas.openxmlformats.org/presentationml/2006/main">
+  <p:cSld>
+    <p:bg>
+      <p:bgPr>
+        <a:solidFill>
+          <a:schemeClr val="bg1"/>
+        </a:solidFill>
+        <a:effectLst/>
+      </p:bgPr>
+    </p:bg>
+    <p:spTree>
+      <p:nvGrpSpPr>
+        <p:cNvPr id="1" name=""/>
+        <p:cNvGrpSpPr/>
+        <p:nvPr/>
+      </p:nvGrpSpPr>
+      <p:grpSpPr>
+        <a:xfrm>
+          <a:off x="0" y="0"/>
+          <a:ext cx="0" cy="0"/>
+          <a:chOff x="0" y="0"/>
+          <a:chExt cx="0" cy="0"/>
+        </a:xfrm>
+      </p:grpSpPr>
+      <p:sp useBgFill="1">
+        <p:nvSpPr>
+          <p:cNvPr id="1042" name="Rectangle 1041">
+            <a:extLst>
+              <a:ext uri="{FF2B5EF4-FFF2-40B4-BE49-F238E27FC236}">
+                <a16:creationId xmlns:a16="http://schemas.microsoft.com/office/drawing/2014/main" id="{8D1AA55E-40D5-461B-A5A8-4AE8AAB71B08}"/>
+              </a:ext>
+              <a:ext uri="{C183D7F6-B498-43B3-948B-1728B52AA6E4}">
+                <adec:decorative xmlns:adec="http://schemas.microsoft.com/office/drawing/2017/decorative" val="1"/>
+              </a:ext>
+            </a:extLst>
+          </p:cNvPr>
+          <p:cNvSpPr>
+            <a:spLocks noGrp="1" noRot="1" noChangeAspect="1" noMove="1" noResize="1" noEditPoints="1" noAdjustHandles="1" noChangeArrowheads="1" noChangeShapeType="1" noTextEdit="1"/>
+          </p:cNvSpPr>
+          <p:nvPr>
+            <p:extLst>
+              <p:ext uri="{386F3935-93C4-4BCD-93E2-E3B085C9AB24}">
+                <p16:designElem xmlns:p16="http://schemas.microsoft.com/office/powerpoint/2015/main" val="1"/>
+              </p:ext>
+            </p:extLst>
+          </p:nvPr>
+        </p:nvSpPr>
+        <p:spPr>
+          <a:xfrm>
+            <a:off x="0" y="0"/>
+            <a:ext cx="12192000" cy="6858000"/>
+          </a:xfrm>
+          <a:prstGeom prst="rect">
+            <a:avLst/>
+          </a:prstGeom>
+          <a:ln>
+            <a:noFill/>
+          </a:ln>
+        </p:spPr>
+        <p:style>
+          <a:lnRef idx="2">
+            <a:schemeClr val="accent1">
+              <a:shade val="50000"/>
+            </a:schemeClr>
+          </a:lnRef>
+          <a:fillRef idx="1">
+            <a:schemeClr val="accent1"/>
+          </a:fillRef>
+          <a:effectRef idx="0">
+            <a:schemeClr val="accent1"/>
+          </a:effectRef>
+          <a:fontRef idx="minor">
+            <a:schemeClr val="lt1"/>
+          </a:fontRef>
+        </p:style>
+        <p:txBody>
+          <a:bodyPr rtlCol="0" anchor="ctr"/>
+          <a:lstStyle/>
+          <a:p>
+            <a:pPr algn="ctr"/>
+            <a:endParaRPr lang="en-US" dirty="0"/>
+          </a:p>
+        </p:txBody>
+      </p:sp>
+      <p:sp>
+        <p:nvSpPr>
+          <p:cNvPr id="6" name="タイトル 3">
+            <a:extLst>
+              <a:ext uri="{FF2B5EF4-FFF2-40B4-BE49-F238E27FC236}">
+                <a16:creationId xmlns:a16="http://schemas.microsoft.com/office/drawing/2014/main" id="{0E820C86-E2EE-19F2-4B1C-4867DCC67722}"/>
+              </a:ext>
+            </a:extLst>
+          </p:cNvPr>
+          <p:cNvSpPr>
+            <a:spLocks noGrp="1"/>
+          </p:cNvSpPr>
+          <p:nvPr>
+            <p:ph type="title"/>
+          </p:nvPr>
+        </p:nvSpPr>
+        <p:spPr>
+          <a:xfrm>
+            <a:off x="838200" y="1336390"/>
+            <a:ext cx="6155988" cy="1182927"/>
+          </a:xfrm>
+          <a:prstGeom prst="rect">
+            <a:avLst/>
+          </a:prstGeom>
+        </p:spPr>
+        <p:style>
+          <a:lnRef idx="2">
+            <a:schemeClr val="accent2">
+              <a:shade val="15000"/>
+            </a:schemeClr>
+          </a:lnRef>
+          <a:fillRef idx="1">
+            <a:schemeClr val="accent2"/>
+          </a:fillRef>
+          <a:effectRef idx="0">
+            <a:schemeClr val="accent2"/>
+          </a:effectRef>
+          <a:fontRef idx="minor">
+            <a:schemeClr val="lt1"/>
+          </a:fontRef>
+        </p:style>
+        <p:txBody>
+          <a:bodyPr vert="horz" lIns="91440" tIns="45720" rIns="91440" bIns="45720" rtlCol="0" anchor="b">
+            <a:normAutofit/>
+          </a:bodyPr>
+          <a:lstStyle/>
+          <a:p>
+            <a:r>
+              <a:rPr lang="ja-JP" altLang="en-US" sz="4300" kern="1200">
+                <a:solidFill>
+                  <a:schemeClr val="tx1"/>
+                </a:solidFill>
+                <a:latin typeface="+mj-lt"/>
+                <a:ea typeface="+mj-ea"/>
+                <a:cs typeface="+mj-cs"/>
+              </a:rPr>
+              <a:t>　ターゲットユーザー</a:t>
+            </a:r>
+            <a:endParaRPr kumimoji="1" lang="en-US" altLang="ja-JP" sz="4300" kern="1200">
+              <a:solidFill>
+                <a:schemeClr val="tx1"/>
+              </a:solidFill>
+              <a:latin typeface="+mj-lt"/>
+              <a:ea typeface="+mj-ea"/>
+              <a:cs typeface="+mj-cs"/>
+            </a:endParaRPr>
+          </a:p>
+        </p:txBody>
+      </p:sp>
+      <p:cxnSp>
+        <p:nvCxnSpPr>
+          <p:cNvPr id="1044" name="Straight Connector 1043">
+            <a:extLst>
+              <a:ext uri="{FF2B5EF4-FFF2-40B4-BE49-F238E27FC236}">
+                <a16:creationId xmlns:a16="http://schemas.microsoft.com/office/drawing/2014/main" id="{7EB498BD-8089-4626-91EA-4978EBEF535E}"/>
+              </a:ext>
+              <a:ext uri="{C183D7F6-B498-43B3-948B-1728B52AA6E4}">
+                <adec:decorative xmlns:adec="http://schemas.microsoft.com/office/drawing/2017/decorative" val="1"/>
+              </a:ext>
+            </a:extLst>
+          </p:cNvPr>
+          <p:cNvCxnSpPr>
+            <a:cxnSpLocks noGrp="1" noRot="1" noChangeAspect="1" noMove="1" noResize="1" noEditPoints="1" noAdjustHandles="1" noChangeArrowheads="1" noChangeShapeType="1"/>
+          </p:cNvCxnSpPr>
+          <p:nvPr>
+            <p:extLst>
+              <p:ext uri="{386F3935-93C4-4BCD-93E2-E3B085C9AB24}">
+                <p16:designElem xmlns:p16="http://schemas.microsoft.com/office/powerpoint/2015/main" val="1"/>
+              </p:ext>
+            </p:extLst>
+          </p:nvPr>
+        </p:nvCxnSpPr>
+        <p:spPr>
+          <a:xfrm>
+            <a:off x="0" y="806470"/>
+            <a:ext cx="7903723" cy="0"/>
+          </a:xfrm>
+          <a:prstGeom prst="line">
+            <a:avLst/>
+          </a:prstGeom>
+          <a:ln w="25400" cap="sq">
+            <a:gradFill flip="none" rotWithShape="1">
+              <a:gsLst>
+                <a:gs pos="0">
+                  <a:schemeClr val="accent1"/>
+                </a:gs>
+                <a:gs pos="100000">
+                  <a:schemeClr val="accent2"/>
+                </a:gs>
+              </a:gsLst>
+              <a:lin ang="10800000" scaled="0"/>
+              <a:tileRect/>
+            </a:gradFill>
+            <a:bevel/>
+          </a:ln>
+        </p:spPr>
+        <p:style>
+          <a:lnRef idx="1">
+            <a:schemeClr val="accent1"/>
+          </a:lnRef>
+          <a:fillRef idx="0">
+            <a:schemeClr val="accent1"/>
+          </a:fillRef>
+          <a:effectRef idx="0">
+            <a:schemeClr val="accent1"/>
+          </a:effectRef>
+          <a:fontRef idx="minor">
+            <a:schemeClr val="tx1"/>
+          </a:fontRef>
+        </p:style>
+      </p:cxnSp>
+      <p:sp>
+        <p:nvSpPr>
+          <p:cNvPr id="5" name="テキスト ボックス 4">
+            <a:extLst>
+              <a:ext uri="{FF2B5EF4-FFF2-40B4-BE49-F238E27FC236}">
+                <a16:creationId xmlns:a16="http://schemas.microsoft.com/office/drawing/2014/main" id="{C553C86A-ABC5-9524-CCF7-4105EDBB4E56}"/>
+              </a:ext>
+            </a:extLst>
+          </p:cNvPr>
+          <p:cNvSpPr txBox="1"/>
+          <p:nvPr/>
+        </p:nvSpPr>
+        <p:spPr>
+          <a:xfrm>
+            <a:off x="803776" y="2829330"/>
+            <a:ext cx="6190412" cy="3344459"/>
+          </a:xfrm>
+          <a:prstGeom prst="rect">
+            <a:avLst/>
+          </a:prstGeom>
+        </p:spPr>
+        <p:txBody>
+          <a:bodyPr vert="horz" lIns="91440" tIns="45720" rIns="91440" bIns="45720" rtlCol="0" anchor="t">
+            <a:normAutofit/>
+          </a:bodyPr>
+          <a:lstStyle/>
+          <a:p>
+            <a:pPr indent="-228600">
+              <a:lnSpc>
+                <a:spcPct val="90000"/>
+              </a:lnSpc>
+              <a:spcAft>
+                <a:spcPts val="600"/>
+              </a:spcAft>
+              <a:buFont typeface="Arial" panose="020B0604020202020204" pitchFamily="34" charset="0"/>
+              <a:buChar char="•"/>
+            </a:pPr>
+            <a:r>
+              <a:rPr lang="ja-JP" altLang="en-US" sz="2000">
+                <a:solidFill>
+                  <a:schemeClr val="tx1">
+                    <a:alpha val="80000"/>
+                  </a:schemeClr>
+                </a:solidFill>
+              </a:rPr>
+              <a:t>ゲーム例）</a:t>
+            </a:r>
+            <a:r>
+              <a:rPr lang="en-US" altLang="ja-JP" sz="2000">
+                <a:solidFill>
+                  <a:schemeClr val="tx1">
+                    <a:alpha val="80000"/>
+                  </a:schemeClr>
+                </a:solidFill>
+              </a:rPr>
+              <a:t>Hollow Knight</a:t>
+            </a:r>
+            <a:r>
+              <a:rPr lang="ja-JP" altLang="en-US" sz="2000">
+                <a:solidFill>
+                  <a:schemeClr val="tx1">
+                    <a:alpha val="80000"/>
+                  </a:schemeClr>
+                </a:solidFill>
+              </a:rPr>
+              <a:t>　好きな層</a:t>
+            </a:r>
+            <a:endParaRPr lang="en-US" altLang="ja-JP" sz="2000">
+              <a:solidFill>
+                <a:schemeClr val="tx1">
+                  <a:alpha val="80000"/>
+                </a:schemeClr>
+              </a:solidFill>
+            </a:endParaRPr>
+          </a:p>
+          <a:p>
+            <a:pPr indent="-228600">
+              <a:lnSpc>
+                <a:spcPct val="90000"/>
+              </a:lnSpc>
+              <a:spcAft>
+                <a:spcPts val="600"/>
+              </a:spcAft>
+              <a:buFont typeface="Arial" panose="020B0604020202020204" pitchFamily="34" charset="0"/>
+              <a:buChar char="•"/>
+            </a:pPr>
+            <a:r>
+              <a:rPr kumimoji="1" lang="ja-JP" altLang="en-US" sz="2000">
+                <a:solidFill>
+                  <a:schemeClr val="tx1">
+                    <a:alpha val="80000"/>
+                  </a:schemeClr>
+                </a:solidFill>
+              </a:rPr>
+              <a:t>　　　　　フロムゲーマー</a:t>
+            </a:r>
+            <a:endParaRPr kumimoji="1" lang="en-US" altLang="ja-JP" sz="2000">
+              <a:solidFill>
+                <a:schemeClr val="tx1">
+                  <a:alpha val="80000"/>
+                </a:schemeClr>
+              </a:solidFill>
+            </a:endParaRPr>
+          </a:p>
+          <a:p>
+            <a:pPr indent="-228600">
+              <a:lnSpc>
+                <a:spcPct val="90000"/>
+              </a:lnSpc>
+              <a:spcAft>
+                <a:spcPts val="600"/>
+              </a:spcAft>
+              <a:buFont typeface="Arial" panose="020B0604020202020204" pitchFamily="34" charset="0"/>
+              <a:buChar char="•"/>
+            </a:pPr>
+            <a:r>
+              <a:rPr kumimoji="1" lang="ja-JP" altLang="en-US" sz="2000">
+                <a:solidFill>
+                  <a:schemeClr val="tx1">
+                    <a:alpha val="80000"/>
+                  </a:schemeClr>
+                </a:solidFill>
+              </a:rPr>
+              <a:t>特別枠）　</a:t>
+            </a:r>
+            <a:r>
+              <a:rPr lang="en-US" altLang="ja-JP" sz="2000">
+                <a:solidFill>
+                  <a:schemeClr val="tx1">
+                    <a:alpha val="80000"/>
+                  </a:schemeClr>
+                </a:solidFill>
+              </a:rPr>
+              <a:t>Re:Monster</a:t>
+            </a:r>
+            <a:r>
+              <a:rPr lang="ja-JP" altLang="en-US" sz="2000">
+                <a:solidFill>
+                  <a:schemeClr val="tx1">
+                    <a:alpha val="80000"/>
+                  </a:schemeClr>
+                </a:solidFill>
+              </a:rPr>
+              <a:t>　をみている人</a:t>
+            </a:r>
+            <a:endParaRPr kumimoji="1" lang="en-US" altLang="ja-JP" sz="2000">
+              <a:solidFill>
+                <a:schemeClr val="tx1">
+                  <a:alpha val="80000"/>
+                </a:schemeClr>
+              </a:solidFill>
+            </a:endParaRPr>
+          </a:p>
+          <a:p>
+            <a:pPr indent="-228600">
+              <a:lnSpc>
+                <a:spcPct val="90000"/>
+              </a:lnSpc>
+              <a:spcAft>
+                <a:spcPts val="600"/>
+              </a:spcAft>
+              <a:buFont typeface="Arial" panose="020B0604020202020204" pitchFamily="34" charset="0"/>
+              <a:buChar char="•"/>
+            </a:pPr>
+            <a:r>
+              <a:rPr lang="ja-JP" altLang="en-US" sz="2000">
+                <a:solidFill>
+                  <a:schemeClr val="tx1">
+                    <a:alpha val="80000"/>
+                  </a:schemeClr>
+                </a:solidFill>
+              </a:rPr>
+              <a:t>想定：</a:t>
+            </a:r>
+            <a:r>
+              <a:rPr lang="en-US" altLang="ja-JP" sz="2000">
+                <a:solidFill>
+                  <a:schemeClr val="tx1">
+                    <a:alpha val="80000"/>
+                  </a:schemeClr>
+                </a:solidFill>
+              </a:rPr>
+              <a:t>50</a:t>
+            </a:r>
+            <a:r>
+              <a:rPr lang="ja-JP" altLang="en-US" sz="2000">
+                <a:solidFill>
+                  <a:schemeClr val="tx1">
+                    <a:alpha val="80000"/>
+                  </a:schemeClr>
+                </a:solidFill>
+              </a:rPr>
+              <a:t>万人程度</a:t>
+            </a:r>
+            <a:endParaRPr lang="en-US" altLang="ja-JP" sz="2000">
+              <a:solidFill>
+                <a:schemeClr val="tx1">
+                  <a:alpha val="80000"/>
+                </a:schemeClr>
+              </a:solidFill>
+            </a:endParaRPr>
+          </a:p>
+        </p:txBody>
+      </p:sp>
+      <p:pic>
+        <p:nvPicPr>
+          <p:cNvPr id="1028" name="Picture 4">
+            <a:extLst>
+              <a:ext uri="{FF2B5EF4-FFF2-40B4-BE49-F238E27FC236}">
+                <a16:creationId xmlns:a16="http://schemas.microsoft.com/office/drawing/2014/main" id="{3721DA3A-A915-71F8-1E1E-BA243488EBD6}"/>
+              </a:ext>
+            </a:extLst>
+          </p:cNvPr>
+          <p:cNvPicPr>
+            <a:picLocks noChangeAspect="1" noChangeArrowheads="1"/>
+          </p:cNvPicPr>
+          <p:nvPr/>
+        </p:nvPicPr>
+        <p:blipFill>
+          <a:blip r:embed="rId2">
+            <a:extLst>
+              <a:ext uri="{28A0092B-C50C-407E-A947-70E740481C1C}">
+                <a14:useLocalDpi xmlns:a14="http://schemas.microsoft.com/office/drawing/2010/main" val="0"/>
+              </a:ext>
+            </a:extLst>
+          </a:blip>
+          <a:stretch>
+            <a:fillRect/>
+          </a:stretch>
+        </p:blipFill>
+        <p:spPr bwMode="auto">
+          <a:xfrm>
+            <a:off x="7635627" y="1336390"/>
+            <a:ext cx="3422456" cy="4837394"/>
+          </a:xfrm>
+          <a:prstGeom prst="rect">
+            <a:avLst/>
+          </a:prstGeom>
+          <a:noFill/>
+          <a:extLst>
+            <a:ext uri="{909E8E84-426E-40DD-AFC4-6F175D3DCCD1}">
+              <a14:hiddenFill xmlns:a14="http://schemas.microsoft.com/office/drawing/2010/main">
+                <a:solidFill>
+                  <a:srgbClr val="FFFFFF"/>
+                </a:solidFill>
+              </a14:hiddenFill>
+            </a:ext>
+          </a:extLst>
+        </p:spPr>
+      </p:pic>
+      <p:sp>
+        <p:nvSpPr>
+          <p:cNvPr id="1046" name="Graphic 11">
+            <a:extLst>
+              <a:ext uri="{FF2B5EF4-FFF2-40B4-BE49-F238E27FC236}">
+                <a16:creationId xmlns:a16="http://schemas.microsoft.com/office/drawing/2014/main" id="{6CB927A4-E432-4310-9CD5-E89FF5063179}"/>
+              </a:ext>
+              <a:ext uri="{C183D7F6-B498-43B3-948B-1728B52AA6E4}">
+                <adec:decorative xmlns:adec="http://schemas.microsoft.com/office/drawing/2017/decorative" val="1"/>
+              </a:ext>
+            </a:extLst>
+          </p:cNvPr>
+          <p:cNvSpPr>
+            <a:spLocks noGrp="1" noRot="1" noChangeAspect="1" noMove="1" noResize="1" noEditPoints="1" noAdjustHandles="1" noChangeArrowheads="1" noChangeShapeType="1" noTextEdit="1"/>
+          </p:cNvSpPr>
+          <p:nvPr>
+            <p:extLst>
+              <p:ext uri="{386F3935-93C4-4BCD-93E2-E3B085C9AB24}">
+                <p16:designElem xmlns:p16="http://schemas.microsoft.com/office/powerpoint/2015/main" val="1"/>
+              </p:ext>
+            </p:extLst>
+          </p:nvPr>
+        </p:nvSpPr>
+        <p:spPr>
+          <a:xfrm>
+            <a:off x="10924552" y="1899284"/>
+            <a:ext cx="139039" cy="139039"/>
+          </a:xfrm>
+          <a:custGeom>
+            <a:avLst/>
+            <a:gdLst>
+              <a:gd name="connsiteX0" fmla="*/ 129602 w 139039"/>
+              <a:gd name="connsiteY0" fmla="*/ 60082 h 139039"/>
+              <a:gd name="connsiteX1" fmla="*/ 78957 w 139039"/>
+              <a:gd name="connsiteY1" fmla="*/ 60082 h 139039"/>
+              <a:gd name="connsiteX2" fmla="*/ 78957 w 139039"/>
+              <a:gd name="connsiteY2" fmla="*/ 9437 h 139039"/>
+              <a:gd name="connsiteX3" fmla="*/ 69520 w 139039"/>
+              <a:gd name="connsiteY3" fmla="*/ 0 h 139039"/>
+              <a:gd name="connsiteX4" fmla="*/ 60082 w 139039"/>
+              <a:gd name="connsiteY4" fmla="*/ 9437 h 139039"/>
+              <a:gd name="connsiteX5" fmla="*/ 60082 w 139039"/>
+              <a:gd name="connsiteY5" fmla="*/ 60082 h 139039"/>
+              <a:gd name="connsiteX6" fmla="*/ 9437 w 139039"/>
+              <a:gd name="connsiteY6" fmla="*/ 60082 h 139039"/>
+              <a:gd name="connsiteX7" fmla="*/ 0 w 139039"/>
+              <a:gd name="connsiteY7" fmla="*/ 69520 h 139039"/>
+              <a:gd name="connsiteX8" fmla="*/ 9437 w 139039"/>
+              <a:gd name="connsiteY8" fmla="*/ 78957 h 139039"/>
+              <a:gd name="connsiteX9" fmla="*/ 60082 w 139039"/>
+              <a:gd name="connsiteY9" fmla="*/ 78957 h 139039"/>
+              <a:gd name="connsiteX10" fmla="*/ 60082 w 139039"/>
+              <a:gd name="connsiteY10" fmla="*/ 129602 h 139039"/>
+              <a:gd name="connsiteX11" fmla="*/ 69520 w 139039"/>
+              <a:gd name="connsiteY11" fmla="*/ 139039 h 139039"/>
+              <a:gd name="connsiteX12" fmla="*/ 78957 w 139039"/>
+              <a:gd name="connsiteY12" fmla="*/ 129602 h 139039"/>
+              <a:gd name="connsiteX13" fmla="*/ 78957 w 139039"/>
+              <a:gd name="connsiteY13" fmla="*/ 78957 h 139039"/>
+              <a:gd name="connsiteX14" fmla="*/ 129602 w 139039"/>
+              <a:gd name="connsiteY14" fmla="*/ 78957 h 139039"/>
+              <a:gd name="connsiteX15" fmla="*/ 139039 w 139039"/>
+              <a:gd name="connsiteY15" fmla="*/ 69520 h 139039"/>
+              <a:gd name="connsiteX16" fmla="*/ 129602 w 139039"/>
+              <a:gd name="connsiteY16" fmla="*/ 60082 h 139039"/>
+            </a:gdLst>
+            <a:ahLst/>
+            <a:cxnLst>
+              <a:cxn ang="0">
+                <a:pos x="connsiteX0" y="connsiteY0"/>
+              </a:cxn>
+              <a:cxn ang="0">
+                <a:pos x="connsiteX1" y="connsiteY1"/>
+              </a:cxn>
+              <a:cxn ang="0">
+                <a:pos x="connsiteX2" y="connsiteY2"/>
+              </a:cxn>
+              <a:cxn ang="0">
+                <a:pos x="connsiteX3" y="connsiteY3"/>
+              </a:cxn>
+              <a:cxn ang="0">
+                <a:pos x="connsiteX4" y="connsiteY4"/>
+              </a:cxn>
+              <a:cxn ang="0">
+                <a:pos x="connsiteX5" y="connsiteY5"/>
+              </a:cxn>
+              <a:cxn ang="0">
+                <a:pos x="connsiteX6" y="connsiteY6"/>
+              </a:cxn>
+              <a:cxn ang="0">
+                <a:pos x="connsiteX7" y="connsiteY7"/>
+              </a:cxn>
+              <a:cxn ang="0">
+                <a:pos x="connsiteX8" y="connsiteY8"/>
+              </a:cxn>
+              <a:cxn ang="0">
+                <a:pos x="connsiteX9" y="connsiteY9"/>
+              </a:cxn>
+              <a:cxn ang="0">
+                <a:pos x="connsiteX10" y="connsiteY10"/>
+              </a:cxn>
+              <a:cxn ang="0">
+                <a:pos x="connsiteX11" y="connsiteY11"/>
+              </a:cxn>
+              <a:cxn ang="0">
+                <a:pos x="connsiteX12" y="connsiteY12"/>
+              </a:cxn>
+              <a:cxn ang="0">
+                <a:pos x="connsiteX13" y="connsiteY13"/>
+              </a:cxn>
+              <a:cxn ang="0">
+                <a:pos x="connsiteX14" y="connsiteY14"/>
+              </a:cxn>
+              <a:cxn ang="0">
+                <a:pos x="connsiteX15" y="connsiteY15"/>
+              </a:cxn>
+              <a:cxn ang="0">
+                <a:pos x="connsiteX16" y="connsiteY16"/>
+              </a:cxn>
+            </a:cxnLst>
+            <a:rect l="l" t="t" r="r" b="b"/>
+            <a:pathLst>
+              <a:path w="139039" h="139039">
+                <a:moveTo>
+                  <a:pt x="129602" y="60082"/>
+                </a:moveTo>
+                <a:lnTo>
+                  <a:pt x="78957" y="60082"/>
+                </a:lnTo>
+                <a:lnTo>
+                  <a:pt x="78957" y="9437"/>
+                </a:lnTo>
+                <a:cubicBezTo>
+                  <a:pt x="78957" y="4225"/>
+                  <a:pt x="74731" y="0"/>
+                  <a:pt x="69520" y="0"/>
+                </a:cubicBezTo>
+                <a:cubicBezTo>
+                  <a:pt x="64308" y="0"/>
+                  <a:pt x="60082" y="4225"/>
+                  <a:pt x="60082" y="9437"/>
+                </a:cubicBezTo>
+                <a:lnTo>
+                  <a:pt x="60082" y="60082"/>
+                </a:lnTo>
+                <a:lnTo>
+                  <a:pt x="9437" y="60082"/>
+                </a:lnTo>
+                <a:cubicBezTo>
+                  <a:pt x="4225" y="60082"/>
+                  <a:pt x="0" y="64308"/>
+                  <a:pt x="0" y="69520"/>
+                </a:cubicBezTo>
+                <a:cubicBezTo>
+                  <a:pt x="0" y="74731"/>
+                  <a:pt x="4225" y="78957"/>
+                  <a:pt x="9437" y="78957"/>
+                </a:cubicBezTo>
+                <a:lnTo>
+                  <a:pt x="60082" y="78957"/>
+                </a:lnTo>
+                <a:lnTo>
+                  <a:pt x="60082" y="129602"/>
+                </a:lnTo>
+                <a:cubicBezTo>
+                  <a:pt x="60082" y="134814"/>
+                  <a:pt x="64308" y="139039"/>
+                  <a:pt x="69520" y="139039"/>
+                </a:cubicBezTo>
+                <a:cubicBezTo>
+                  <a:pt x="74731" y="139039"/>
+                  <a:pt x="78957" y="134814"/>
+                  <a:pt x="78957" y="129602"/>
+                </a:cubicBezTo>
+                <a:lnTo>
+                  <a:pt x="78957" y="78957"/>
+                </a:lnTo>
+                <a:lnTo>
+                  <a:pt x="129602" y="78957"/>
+                </a:lnTo>
+                <a:cubicBezTo>
+                  <a:pt x="134814" y="78957"/>
+                  <a:pt x="139039" y="74731"/>
+                  <a:pt x="139039" y="69520"/>
+                </a:cubicBezTo>
+                <a:cubicBezTo>
+                  <a:pt x="139039" y="64308"/>
+                  <a:pt x="134814" y="60082"/>
+                  <a:pt x="129602" y="60082"/>
+                </a:cubicBezTo>
+                <a:close/>
+              </a:path>
+            </a:pathLst>
+          </a:custGeom>
+          <a:solidFill>
+            <a:schemeClr val="accent1"/>
+          </a:solidFill>
+          <a:ln w="603" cap="flat">
+            <a:noFill/>
+            <a:prstDash val="solid"/>
+            <a:miter/>
+          </a:ln>
+        </p:spPr>
+        <p:txBody>
+          <a:bodyPr rtlCol="0" anchor="ctr"/>
+          <a:lstStyle/>
+          <a:p>
+            <a:endParaRPr lang="en-US"/>
+          </a:p>
+        </p:txBody>
+      </p:sp>
+      <p:sp>
+        <p:nvSpPr>
+          <p:cNvPr id="1048" name="Graphic 10">
+            <a:extLst>
+              <a:ext uri="{FF2B5EF4-FFF2-40B4-BE49-F238E27FC236}">
+                <a16:creationId xmlns:a16="http://schemas.microsoft.com/office/drawing/2014/main" id="{E3020543-B24B-4EC4-8FFC-8DD88EEA91A8}"/>
+              </a:ext>
+              <a:ext uri="{C183D7F6-B498-43B3-948B-1728B52AA6E4}">
+                <adec:decorative xmlns:adec="http://schemas.microsoft.com/office/drawing/2017/decorative" val="1"/>
+              </a:ext>
+            </a:extLst>
+          </p:cNvPr>
+          <p:cNvSpPr>
+            <a:spLocks noGrp="1" noRot="1" noChangeAspect="1" noMove="1" noResize="1" noEditPoints="1" noAdjustHandles="1" noChangeArrowheads="1" noChangeShapeType="1" noTextEdit="1"/>
+          </p:cNvSpPr>
+          <p:nvPr>
+            <p:extLst>
+              <p:ext uri="{386F3935-93C4-4BCD-93E2-E3B085C9AB24}">
+                <p16:designElem xmlns:p16="http://schemas.microsoft.com/office/powerpoint/2015/main" val="1"/>
+              </p:ext>
+            </p:extLst>
+          </p:nvPr>
+        </p:nvSpPr>
+        <p:spPr>
+          <a:xfrm>
+            <a:off x="11236862" y="2189928"/>
+            <a:ext cx="91138" cy="91138"/>
+          </a:xfrm>
+          <a:custGeom>
+            <a:avLst/>
+            <a:gdLst>
+              <a:gd name="connsiteX0" fmla="*/ 91138 w 91138"/>
+              <a:gd name="connsiteY0" fmla="*/ 45569 h 91138"/>
+              <a:gd name="connsiteX1" fmla="*/ 45569 w 91138"/>
+              <a:gd name="connsiteY1" fmla="*/ 91138 h 91138"/>
+              <a:gd name="connsiteX2" fmla="*/ 0 w 91138"/>
+              <a:gd name="connsiteY2" fmla="*/ 45569 h 91138"/>
+              <a:gd name="connsiteX3" fmla="*/ 45569 w 91138"/>
+              <a:gd name="connsiteY3" fmla="*/ 0 h 91138"/>
+              <a:gd name="connsiteX4" fmla="*/ 91138 w 91138"/>
+              <a:gd name="connsiteY4" fmla="*/ 45569 h 91138"/>
+            </a:gdLst>
+            <a:ahLst/>
+            <a:cxnLst>
+              <a:cxn ang="0">
+                <a:pos x="connsiteX0" y="connsiteY0"/>
+              </a:cxn>
+              <a:cxn ang="0">
+                <a:pos x="connsiteX1" y="connsiteY1"/>
+              </a:cxn>
+              <a:cxn ang="0">
+                <a:pos x="connsiteX2" y="connsiteY2"/>
+              </a:cxn>
+              <a:cxn ang="0">
+                <a:pos x="connsiteX3" y="connsiteY3"/>
+              </a:cxn>
+              <a:cxn ang="0">
+                <a:pos x="connsiteX4" y="connsiteY4"/>
+              </a:cxn>
+            </a:cxnLst>
+            <a:rect l="l" t="t" r="r" b="b"/>
+            <a:pathLst>
+              <a:path w="91138" h="91138">
+                <a:moveTo>
+                  <a:pt x="91138" y="45569"/>
+                </a:moveTo>
+                <a:cubicBezTo>
+                  <a:pt x="91138" y="70736"/>
+                  <a:pt x="70736" y="91138"/>
+                  <a:pt x="45569" y="91138"/>
+                </a:cubicBezTo>
+                <a:cubicBezTo>
+                  <a:pt x="20402" y="91138"/>
+                  <a:pt x="0" y="70736"/>
+                  <a:pt x="0" y="45569"/>
+                </a:cubicBezTo>
+                <a:cubicBezTo>
+                  <a:pt x="0" y="20402"/>
+                  <a:pt x="20402" y="0"/>
+                  <a:pt x="45569" y="0"/>
+                </a:cubicBezTo>
+                <a:cubicBezTo>
+                  <a:pt x="70736" y="0"/>
+                  <a:pt x="91138" y="20402"/>
+                  <a:pt x="91138" y="45569"/>
+                </a:cubicBezTo>
+                <a:close/>
+              </a:path>
+            </a:pathLst>
+          </a:custGeom>
+          <a:solidFill>
+            <a:schemeClr val="accent1"/>
+          </a:solidFill>
+          <a:ln w="422" cap="flat">
+            <a:noFill/>
+            <a:prstDash val="solid"/>
+            <a:miter/>
+          </a:ln>
+        </p:spPr>
+        <p:txBody>
+          <a:bodyPr rtlCol="0" anchor="ctr"/>
+          <a:lstStyle/>
+          <a:p>
+            <a:endParaRPr lang="en-US"/>
+          </a:p>
+        </p:txBody>
+      </p:sp>
+    </p:spTree>
+    <p:extLst>
+      <p:ext uri="{BB962C8B-B14F-4D97-AF65-F5344CB8AC3E}">
+        <p14:creationId xmlns:p14="http://schemas.microsoft.com/office/powerpoint/2010/main" val="187369970"/>
+      </p:ext>
+    </p:extLst>
+  </p:cSld>
+  <p:clrMapOvr>
+    <a:masterClrMapping/>
+  </p:clrMapOvr>
+</p:sld>
+</file>
+
+<file path=ppt/slides/slide6.xml><?xml version="1.0" encoding="utf-8"?>
 <p:sld xmlns:a="http://schemas.openxmlformats.org/drawingml/2006/main" xmlns:r="http://schemas.openxmlformats.org/officeDocument/2006/relationships" xmlns:p="http://schemas.openxmlformats.org/presentationml/2006/main">
   <p:cSld>
     <p:spTree>
@@ -5015,7 +6071,7 @@
         <p:spPr>
           <a:xfrm>
             <a:off x="674255" y="1902691"/>
-            <a:ext cx="3713018" cy="369332"/>
+            <a:ext cx="4470400" cy="400110"/>
           </a:xfrm>
           <a:prstGeom prst="rect">
             <a:avLst/>
@@ -5029,8 +6085,8 @@
           <a:lstStyle/>
           <a:p>
             <a:r>
-              <a:rPr kumimoji="1" lang="ja-JP" altLang="en-US" dirty="0"/>
-              <a:t>横スクロール型アクションゲーム</a:t>
+              <a:rPr kumimoji="1" lang="ja-JP" altLang="en-US" sz="2000" dirty="0"/>
+              <a:t>横スクロール型アクショゲーム</a:t>
             </a:r>
           </a:p>
         </p:txBody>
@@ -5049,8 +6105,8 @@
         </p:nvSpPr>
         <p:spPr>
           <a:xfrm>
-            <a:off x="674255" y="2406882"/>
-            <a:ext cx="4479637" cy="646331"/>
+            <a:off x="674254" y="2616541"/>
+            <a:ext cx="4886036" cy="400110"/>
           </a:xfrm>
           <a:prstGeom prst="rect">
             <a:avLst/>
@@ -5064,17 +6120,18 @@
           <a:lstStyle/>
           <a:p>
             <a:r>
-              <a:rPr kumimoji="1" lang="ja-JP" altLang="en-US" dirty="0"/>
+              <a:rPr kumimoji="1" lang="ja-JP" altLang="en-US" sz="2000" dirty="0"/>
               <a:t>ソロプレイ</a:t>
             </a:r>
-            <a:endParaRPr kumimoji="1" lang="en-US" altLang="ja-JP" dirty="0"/>
-          </a:p>
-          <a:p>
-            <a:r>
-              <a:rPr lang="ja-JP" altLang="en-US" dirty="0"/>
+            <a:r>
+              <a:rPr lang="en-US" altLang="ja-JP" sz="2000" dirty="0"/>
+              <a:t>	</a:t>
+            </a:r>
+            <a:r>
+              <a:rPr lang="ja-JP" altLang="en-US" sz="2000" dirty="0"/>
               <a:t>プレイヤーはスライム！</a:t>
             </a:r>
-            <a:endParaRPr kumimoji="1" lang="ja-JP" altLang="en-US" dirty="0"/>
+            <a:endParaRPr kumimoji="1" lang="ja-JP" altLang="en-US" sz="2000" dirty="0"/>
           </a:p>
         </p:txBody>
       </p:sp>
@@ -5093,7 +6150,7 @@
         <p:spPr>
           <a:xfrm>
             <a:off x="674255" y="4353163"/>
-            <a:ext cx="5338618" cy="369332"/>
+            <a:ext cx="5338618" cy="1600438"/>
           </a:xfrm>
           <a:prstGeom prst="rect">
             <a:avLst/>
@@ -5107,9 +6164,37 @@
           <a:lstStyle/>
           <a:p>
             <a:r>
-              <a:rPr kumimoji="1" lang="ja-JP" altLang="en-US" dirty="0"/>
+              <a:rPr kumimoji="1" lang="ja-JP" altLang="en-US" sz="2000" dirty="0"/>
               <a:t>カメラはプレイヤー中心に動いていく</a:t>
             </a:r>
+            <a:endParaRPr kumimoji="1" lang="en-US" altLang="ja-JP" sz="2000" dirty="0"/>
+          </a:p>
+          <a:p>
+            <a:r>
+              <a:rPr lang="en-US" altLang="ja-JP" sz="2000" dirty="0"/>
+              <a:t>AD</a:t>
+            </a:r>
+            <a:r>
+              <a:rPr lang="ja-JP" altLang="en-US" sz="2000" dirty="0"/>
+              <a:t>移動でクリックなどで攻撃</a:t>
+            </a:r>
+            <a:endParaRPr lang="en-US" altLang="ja-JP" sz="2000" dirty="0"/>
+          </a:p>
+          <a:p>
+            <a:r>
+              <a:rPr lang="ja-JP" altLang="en-US" sz="2000" dirty="0"/>
+              <a:t>マウスが向いている方向に攻撃なので</a:t>
+            </a:r>
+            <a:endParaRPr lang="en-US" altLang="ja-JP" sz="2000" dirty="0"/>
+          </a:p>
+          <a:p>
+            <a:r>
+              <a:rPr lang="ja-JP" altLang="en-US" sz="2000" dirty="0"/>
+              <a:t>全方位に攻撃することも可能</a:t>
+            </a:r>
+          </a:p>
+          <a:p>
+            <a:endParaRPr kumimoji="1" lang="ja-JP" altLang="en-US" dirty="0"/>
           </a:p>
         </p:txBody>
       </p:sp>
@@ -5127,8 +6212,8 @@
         </p:nvSpPr>
         <p:spPr>
           <a:xfrm>
-            <a:off x="674255" y="3656963"/>
-            <a:ext cx="3343564" cy="369332"/>
+            <a:off x="674254" y="3738574"/>
+            <a:ext cx="3343564" cy="400110"/>
           </a:xfrm>
           <a:prstGeom prst="rect">
             <a:avLst/>
@@ -5142,10 +6227,10 @@
           <a:lstStyle/>
           <a:p>
             <a:r>
-              <a:rPr lang="ja-JP" altLang="en-US" dirty="0"/>
+              <a:rPr lang="ja-JP" altLang="en-US" sz="2000" dirty="0"/>
               <a:t>ステージギミック作る予定</a:t>
             </a:r>
-            <a:endParaRPr kumimoji="1" lang="ja-JP" altLang="en-US" dirty="0"/>
+            <a:endParaRPr kumimoji="1" lang="ja-JP" altLang="en-US" sz="2000" dirty="0"/>
           </a:p>
         </p:txBody>
       </p:sp>
@@ -5163,8 +6248,8 @@
         </p:nvSpPr>
         <p:spPr>
           <a:xfrm>
-            <a:off x="674254" y="3170422"/>
-            <a:ext cx="3500581" cy="369332"/>
+            <a:off x="674254" y="3123986"/>
+            <a:ext cx="3500581" cy="400110"/>
           </a:xfrm>
           <a:prstGeom prst="rect">
             <a:avLst/>
@@ -5178,71 +6263,10 @@
           <a:lstStyle/>
           <a:p>
             <a:r>
-              <a:rPr lang="ja-JP" altLang="en-US" dirty="0"/>
+              <a:rPr lang="ja-JP" altLang="en-US" sz="2000" dirty="0"/>
               <a:t>ゲーム難易度：高難易度</a:t>
             </a:r>
-            <a:endParaRPr kumimoji="1" lang="ja-JP" altLang="en-US" dirty="0"/>
-          </a:p>
-        </p:txBody>
-      </p:sp>
-      <p:sp>
-        <p:nvSpPr>
-          <p:cNvPr id="3" name="テキスト ボックス 2">
-            <a:extLst>
-              <a:ext uri="{FF2B5EF4-FFF2-40B4-BE49-F238E27FC236}">
-                <a16:creationId xmlns:a16="http://schemas.microsoft.com/office/drawing/2014/main" id="{DF043EAB-4605-6A5C-9E8A-DD233C7D8B0E}"/>
-              </a:ext>
-            </a:extLst>
-          </p:cNvPr>
-          <p:cNvSpPr txBox="1"/>
-          <p:nvPr/>
-        </p:nvSpPr>
-        <p:spPr>
-          <a:xfrm>
-            <a:off x="674254" y="4987635"/>
-            <a:ext cx="4479637" cy="1200329"/>
-          </a:xfrm>
-          <a:prstGeom prst="rect">
-            <a:avLst/>
-          </a:prstGeom>
-          <a:noFill/>
-        </p:spPr>
-        <p:txBody>
-          <a:bodyPr wrap="square" rtlCol="0">
-            <a:spAutoFit/>
-          </a:bodyPr>
-          <a:lstStyle/>
-          <a:p>
-            <a:r>
-              <a:rPr lang="en-US" altLang="ja-JP" dirty="0"/>
-              <a:t>WASD</a:t>
-            </a:r>
-            <a:r>
-              <a:rPr lang="ja-JP" altLang="en-US" dirty="0"/>
-              <a:t>移動で</a:t>
-            </a:r>
-            <a:endParaRPr lang="en-US" altLang="ja-JP" dirty="0"/>
-          </a:p>
-          <a:p>
-            <a:r>
-              <a:rPr kumimoji="1" lang="ja-JP" altLang="en-US" dirty="0"/>
-              <a:t>クリックで攻撃</a:t>
-            </a:r>
-            <a:endParaRPr kumimoji="1" lang="en-US" altLang="ja-JP" dirty="0"/>
-          </a:p>
-          <a:p>
-            <a:r>
-              <a:rPr lang="ja-JP" altLang="en-US" dirty="0"/>
-              <a:t>マウスが向いている方向に攻撃なので</a:t>
-            </a:r>
-            <a:endParaRPr lang="en-US" altLang="ja-JP" dirty="0"/>
-          </a:p>
-          <a:p>
-            <a:r>
-              <a:rPr lang="ja-JP" altLang="en-US" dirty="0"/>
-              <a:t>全方位に攻撃することも可能</a:t>
-            </a:r>
-            <a:endParaRPr kumimoji="1" lang="ja-JP" altLang="en-US" dirty="0"/>
+            <a:endParaRPr kumimoji="1" lang="ja-JP" altLang="en-US" sz="2000" dirty="0"/>
           </a:p>
         </p:txBody>
       </p:sp>
@@ -5259,7 +6283,7 @@
 </p:sld>
 </file>
 
-<file path=ppt/slides/slide5.xml><?xml version="1.0" encoding="utf-8"?>
+<file path=ppt/slides/slide7.xml><?xml version="1.0" encoding="utf-8"?>
 <p:sld xmlns:a="http://schemas.openxmlformats.org/drawingml/2006/main" xmlns:r="http://schemas.openxmlformats.org/officeDocument/2006/relationships" xmlns:p="http://schemas.openxmlformats.org/presentationml/2006/main">
   <p:cSld>
     <p:spTree>
@@ -5292,7 +6316,12 @@
             <p:ph idx="1"/>
           </p:nvPr>
         </p:nvSpPr>
-        <p:spPr/>
+        <p:spPr>
+          <a:xfrm>
+            <a:off x="838200" y="2823152"/>
+            <a:ext cx="10515600" cy="3457575"/>
+          </a:xfrm>
+        </p:spPr>
         <p:txBody>
           <a:bodyPr>
             <a:normAutofit/>
@@ -5318,6 +6347,12 @@
             <a:endParaRPr kumimoji="1" lang="en-US" altLang="ja-JP" dirty="0"/>
           </a:p>
           <a:p>
+            <a:pPr marL="0" indent="0">
+              <a:buNone/>
+            </a:pPr>
+            <a:endParaRPr lang="en-US" altLang="ja-JP" dirty="0"/>
+          </a:p>
+          <a:p>
             <a:r>
               <a:rPr lang="ja-JP" altLang="en-US" dirty="0"/>
               <a:t>特徴：ボスを倒すことでボスの能力を取得することで強くなる</a:t>
@@ -5325,15 +6360,10 @@
             <a:endParaRPr lang="en-US" altLang="ja-JP" dirty="0"/>
           </a:p>
           <a:p>
-            <a:r>
-              <a:rPr lang="ja-JP" altLang="en-US" dirty="0"/>
-              <a:t>例）防御能力、ダッシュ、飛び道具攻撃 </a:t>
-            </a:r>
-            <a:r>
-              <a:rPr lang="en-US" altLang="ja-JP" dirty="0" err="1"/>
-              <a:t>etc</a:t>
-            </a:r>
-            <a:endParaRPr lang="ja-JP" altLang="en-US" dirty="0"/>
+            <a:pPr marL="0" indent="0">
+              <a:buNone/>
+            </a:pPr>
+            <a:endParaRPr kumimoji="1" lang="en-US" altLang="ja-JP" dirty="0"/>
           </a:p>
           <a:p>
             <a:r>
@@ -5413,7 +6443,7 @@
 </p:sld>
 </file>
 
-<file path=ppt/slides/slide6.xml><?xml version="1.0" encoding="utf-8"?>
+<file path=ppt/slides/slide8.xml><?xml version="1.0" encoding="utf-8"?>
 <p:sld xmlns:a="http://schemas.openxmlformats.org/drawingml/2006/main" xmlns:r="http://schemas.openxmlformats.org/officeDocument/2006/relationships" xmlns:p="http://schemas.openxmlformats.org/presentationml/2006/main" show="0">
   <p:cSld>
     <p:spTree>
@@ -5742,7 +6772,7 @@
 </p:sld>
 </file>
 
-<file path=ppt/slides/slide7.xml><?xml version="1.0" encoding="utf-8"?>
+<file path=ppt/slides/slide9.xml><?xml version="1.0" encoding="utf-8"?>
 <p:sld xmlns:a="http://schemas.openxmlformats.org/drawingml/2006/main" xmlns:r="http://schemas.openxmlformats.org/officeDocument/2006/relationships" xmlns:p="http://schemas.openxmlformats.org/presentationml/2006/main" show="0">
   <p:cSld>
     <p:spTree>

--- a/チーム制作企画書.pptx
+++ b/チーム制作企画書.pptx
@@ -205,7 +205,7 @@
           <a:p>
             <a:fld id="{CDC39EF4-E118-4F1C-8737-E9ABF732305C}" type="datetimeFigureOut">
               <a:rPr kumimoji="1" lang="ja-JP" altLang="en-US" smtClean="0"/>
-              <a:t>2026/4/27</a:t>
+              <a:t>2026/4/28</a:t>
             </a:fld>
             <a:endParaRPr kumimoji="1" lang="ja-JP" altLang="en-US"/>
           </a:p>
@@ -738,7 +738,7 @@
           <a:p>
             <a:fld id="{3110F15D-2E9B-47C9-86DF-58A2282AFBC9}" type="datetimeFigureOut">
               <a:rPr kumimoji="1" lang="ja-JP" altLang="en-US" smtClean="0"/>
-              <a:t>2026/4/27</a:t>
+              <a:t>2026/4/28</a:t>
             </a:fld>
             <a:endParaRPr kumimoji="1" lang="ja-JP" altLang="en-US"/>
           </a:p>
@@ -968,7 +968,7 @@
           <a:p>
             <a:fld id="{3110F15D-2E9B-47C9-86DF-58A2282AFBC9}" type="datetimeFigureOut">
               <a:rPr kumimoji="1" lang="ja-JP" altLang="en-US" smtClean="0"/>
-              <a:t>2026/4/27</a:t>
+              <a:t>2026/4/28</a:t>
             </a:fld>
             <a:endParaRPr kumimoji="1" lang="ja-JP" altLang="en-US"/>
           </a:p>
@@ -1208,7 +1208,7 @@
           <a:p>
             <a:fld id="{3110F15D-2E9B-47C9-86DF-58A2282AFBC9}" type="datetimeFigureOut">
               <a:rPr kumimoji="1" lang="ja-JP" altLang="en-US" smtClean="0"/>
-              <a:t>2026/4/27</a:t>
+              <a:t>2026/4/28</a:t>
             </a:fld>
             <a:endParaRPr kumimoji="1" lang="ja-JP" altLang="en-US"/>
           </a:p>
@@ -1438,7 +1438,7 @@
           <a:p>
             <a:fld id="{3110F15D-2E9B-47C9-86DF-58A2282AFBC9}" type="datetimeFigureOut">
               <a:rPr kumimoji="1" lang="ja-JP" altLang="en-US" smtClean="0"/>
-              <a:t>2026/4/27</a:t>
+              <a:t>2026/4/28</a:t>
             </a:fld>
             <a:endParaRPr kumimoji="1" lang="ja-JP" altLang="en-US"/>
           </a:p>
@@ -1713,7 +1713,7 @@
           <a:p>
             <a:fld id="{3110F15D-2E9B-47C9-86DF-58A2282AFBC9}" type="datetimeFigureOut">
               <a:rPr kumimoji="1" lang="ja-JP" altLang="en-US" smtClean="0"/>
-              <a:t>2026/4/27</a:t>
+              <a:t>2026/4/28</a:t>
             </a:fld>
             <a:endParaRPr kumimoji="1" lang="ja-JP" altLang="en-US"/>
           </a:p>
@@ -2042,7 +2042,7 @@
           <a:p>
             <a:fld id="{3110F15D-2E9B-47C9-86DF-58A2282AFBC9}" type="datetimeFigureOut">
               <a:rPr kumimoji="1" lang="ja-JP" altLang="en-US" smtClean="0"/>
-              <a:t>2026/4/27</a:t>
+              <a:t>2026/4/28</a:t>
             </a:fld>
             <a:endParaRPr kumimoji="1" lang="ja-JP" altLang="en-US"/>
           </a:p>
@@ -2518,7 +2518,7 @@
           <a:p>
             <a:fld id="{3110F15D-2E9B-47C9-86DF-58A2282AFBC9}" type="datetimeFigureOut">
               <a:rPr kumimoji="1" lang="ja-JP" altLang="en-US" smtClean="0"/>
-              <a:t>2026/4/27</a:t>
+              <a:t>2026/4/28</a:t>
             </a:fld>
             <a:endParaRPr kumimoji="1" lang="ja-JP" altLang="en-US"/>
           </a:p>
@@ -2659,7 +2659,7 @@
           <a:p>
             <a:fld id="{3110F15D-2E9B-47C9-86DF-58A2282AFBC9}" type="datetimeFigureOut">
               <a:rPr kumimoji="1" lang="ja-JP" altLang="en-US" smtClean="0"/>
-              <a:t>2026/4/27</a:t>
+              <a:t>2026/4/28</a:t>
             </a:fld>
             <a:endParaRPr kumimoji="1" lang="ja-JP" altLang="en-US"/>
           </a:p>
@@ -2772,7 +2772,7 @@
           <a:p>
             <a:fld id="{3110F15D-2E9B-47C9-86DF-58A2282AFBC9}" type="datetimeFigureOut">
               <a:rPr kumimoji="1" lang="ja-JP" altLang="en-US" smtClean="0"/>
-              <a:t>2026/4/27</a:t>
+              <a:t>2026/4/28</a:t>
             </a:fld>
             <a:endParaRPr kumimoji="1" lang="ja-JP" altLang="en-US"/>
           </a:p>
@@ -3115,7 +3115,7 @@
           <a:p>
             <a:fld id="{3110F15D-2E9B-47C9-86DF-58A2282AFBC9}" type="datetimeFigureOut">
               <a:rPr kumimoji="1" lang="ja-JP" altLang="en-US" smtClean="0"/>
-              <a:t>2026/4/27</a:t>
+              <a:t>2026/4/28</a:t>
             </a:fld>
             <a:endParaRPr kumimoji="1" lang="ja-JP" altLang="en-US"/>
           </a:p>
@@ -3403,7 +3403,7 @@
           <a:p>
             <a:fld id="{3110F15D-2E9B-47C9-86DF-58A2282AFBC9}" type="datetimeFigureOut">
               <a:rPr kumimoji="1" lang="ja-JP" altLang="en-US" smtClean="0"/>
-              <a:t>2026/4/27</a:t>
+              <a:t>2026/4/28</a:t>
             </a:fld>
             <a:endParaRPr kumimoji="1" lang="ja-JP" altLang="en-US"/>
           </a:p>
@@ -3676,7 +3676,7 @@
           <a:p>
             <a:fld id="{3110F15D-2E9B-47C9-86DF-58A2282AFBC9}" type="datetimeFigureOut">
               <a:rPr kumimoji="1" lang="ja-JP" altLang="en-US" smtClean="0"/>
-              <a:t>2026/4/27</a:t>
+              <a:t>2026/4/28</a:t>
             </a:fld>
             <a:endParaRPr kumimoji="1" lang="ja-JP" altLang="en-US"/>
           </a:p>
@@ -5039,8 +5039,8 @@
         </p:nvSpPr>
         <p:spPr>
           <a:xfrm>
-            <a:off x="1965037" y="2084242"/>
-            <a:ext cx="3706090" cy="1325562"/>
+            <a:off x="3793837" y="1727056"/>
+            <a:ext cx="5781484" cy="1325562"/>
           </a:xfrm>
         </p:spPr>
         <p:txBody>
@@ -5053,7 +5053,7 @@
               <a:buNone/>
             </a:pPr>
             <a:r>
-              <a:rPr kumimoji="1" lang="ja-JP" altLang="en-US" sz="8800" i="1" dirty="0">
+              <a:rPr kumimoji="1" lang="ja-JP" altLang="en-US" sz="13800" i="1" dirty="0">
                 <a:latin typeface="HGP行書体" panose="03000600000000000000" pitchFamily="66" charset="-128"/>
                 <a:ea typeface="HGP行書体" panose="03000600000000000000" pitchFamily="66" charset="-128"/>
               </a:rPr>

--- a/チーム制作企画書.pptx
+++ b/チーム制作企画書.pptx
@@ -205,7 +205,7 @@
           <a:p>
             <a:fld id="{CDC39EF4-E118-4F1C-8737-E9ABF732305C}" type="datetimeFigureOut">
               <a:rPr kumimoji="1" lang="ja-JP" altLang="en-US" smtClean="0"/>
-              <a:t>2026/4/28</a:t>
+              <a:t>2026/6/8</a:t>
             </a:fld>
             <a:endParaRPr kumimoji="1" lang="ja-JP" altLang="en-US"/>
           </a:p>
@@ -738,7 +738,7 @@
           <a:p>
             <a:fld id="{3110F15D-2E9B-47C9-86DF-58A2282AFBC9}" type="datetimeFigureOut">
               <a:rPr kumimoji="1" lang="ja-JP" altLang="en-US" smtClean="0"/>
-              <a:t>2026/4/28</a:t>
+              <a:t>2026/6/8</a:t>
             </a:fld>
             <a:endParaRPr kumimoji="1" lang="ja-JP" altLang="en-US"/>
           </a:p>
@@ -968,7 +968,7 @@
           <a:p>
             <a:fld id="{3110F15D-2E9B-47C9-86DF-58A2282AFBC9}" type="datetimeFigureOut">
               <a:rPr kumimoji="1" lang="ja-JP" altLang="en-US" smtClean="0"/>
-              <a:t>2026/4/28</a:t>
+              <a:t>2026/6/8</a:t>
             </a:fld>
             <a:endParaRPr kumimoji="1" lang="ja-JP" altLang="en-US"/>
           </a:p>
@@ -1208,7 +1208,7 @@
           <a:p>
             <a:fld id="{3110F15D-2E9B-47C9-86DF-58A2282AFBC9}" type="datetimeFigureOut">
               <a:rPr kumimoji="1" lang="ja-JP" altLang="en-US" smtClean="0"/>
-              <a:t>2026/4/28</a:t>
+              <a:t>2026/6/8</a:t>
             </a:fld>
             <a:endParaRPr kumimoji="1" lang="ja-JP" altLang="en-US"/>
           </a:p>
@@ -1438,7 +1438,7 @@
           <a:p>
             <a:fld id="{3110F15D-2E9B-47C9-86DF-58A2282AFBC9}" type="datetimeFigureOut">
               <a:rPr kumimoji="1" lang="ja-JP" altLang="en-US" smtClean="0"/>
-              <a:t>2026/4/28</a:t>
+              <a:t>2026/6/8</a:t>
             </a:fld>
             <a:endParaRPr kumimoji="1" lang="ja-JP" altLang="en-US"/>
           </a:p>
@@ -1713,7 +1713,7 @@
           <a:p>
             <a:fld id="{3110F15D-2E9B-47C9-86DF-58A2282AFBC9}" type="datetimeFigureOut">
               <a:rPr kumimoji="1" lang="ja-JP" altLang="en-US" smtClean="0"/>
-              <a:t>2026/4/28</a:t>
+              <a:t>2026/6/8</a:t>
             </a:fld>
             <a:endParaRPr kumimoji="1" lang="ja-JP" altLang="en-US"/>
           </a:p>
@@ -2042,7 +2042,7 @@
           <a:p>
             <a:fld id="{3110F15D-2E9B-47C9-86DF-58A2282AFBC9}" type="datetimeFigureOut">
               <a:rPr kumimoji="1" lang="ja-JP" altLang="en-US" smtClean="0"/>
-              <a:t>2026/4/28</a:t>
+              <a:t>2026/6/8</a:t>
             </a:fld>
             <a:endParaRPr kumimoji="1" lang="ja-JP" altLang="en-US"/>
           </a:p>
@@ -2518,7 +2518,7 @@
           <a:p>
             <a:fld id="{3110F15D-2E9B-47C9-86DF-58A2282AFBC9}" type="datetimeFigureOut">
               <a:rPr kumimoji="1" lang="ja-JP" altLang="en-US" smtClean="0"/>
-              <a:t>2026/4/28</a:t>
+              <a:t>2026/6/8</a:t>
             </a:fld>
             <a:endParaRPr kumimoji="1" lang="ja-JP" altLang="en-US"/>
           </a:p>
@@ -2659,7 +2659,7 @@
           <a:p>
             <a:fld id="{3110F15D-2E9B-47C9-86DF-58A2282AFBC9}" type="datetimeFigureOut">
               <a:rPr kumimoji="1" lang="ja-JP" altLang="en-US" smtClean="0"/>
-              <a:t>2026/4/28</a:t>
+              <a:t>2026/6/8</a:t>
             </a:fld>
             <a:endParaRPr kumimoji="1" lang="ja-JP" altLang="en-US"/>
           </a:p>
@@ -2772,7 +2772,7 @@
           <a:p>
             <a:fld id="{3110F15D-2E9B-47C9-86DF-58A2282AFBC9}" type="datetimeFigureOut">
               <a:rPr kumimoji="1" lang="ja-JP" altLang="en-US" smtClean="0"/>
-              <a:t>2026/4/28</a:t>
+              <a:t>2026/6/8</a:t>
             </a:fld>
             <a:endParaRPr kumimoji="1" lang="ja-JP" altLang="en-US"/>
           </a:p>
@@ -3115,7 +3115,7 @@
           <a:p>
             <a:fld id="{3110F15D-2E9B-47C9-86DF-58A2282AFBC9}" type="datetimeFigureOut">
               <a:rPr kumimoji="1" lang="ja-JP" altLang="en-US" smtClean="0"/>
-              <a:t>2026/4/28</a:t>
+              <a:t>2026/6/8</a:t>
             </a:fld>
             <a:endParaRPr kumimoji="1" lang="ja-JP" altLang="en-US"/>
           </a:p>
@@ -3403,7 +3403,7 @@
           <a:p>
             <a:fld id="{3110F15D-2E9B-47C9-86DF-58A2282AFBC9}" type="datetimeFigureOut">
               <a:rPr kumimoji="1" lang="ja-JP" altLang="en-US" smtClean="0"/>
-              <a:t>2026/4/28</a:t>
+              <a:t>2026/6/8</a:t>
             </a:fld>
             <a:endParaRPr kumimoji="1" lang="ja-JP" altLang="en-US"/>
           </a:p>
@@ -3676,7 +3676,7 @@
           <a:p>
             <a:fld id="{3110F15D-2E9B-47C9-86DF-58A2282AFBC9}" type="datetimeFigureOut">
               <a:rPr kumimoji="1" lang="ja-JP" altLang="en-US" smtClean="0"/>
-              <a:t>2026/4/28</a:t>
+              <a:t>2026/6/8</a:t>
             </a:fld>
             <a:endParaRPr kumimoji="1" lang="ja-JP" altLang="en-US"/>
           </a:p>
